--- a/curso/pptx/S41.pptx
+++ b/curso/pptx/S41.pptx
@@ -3892,8 +3892,8 @@
         </p:nvSpPr>
         <p:spPr>
           <a:xfrm>
-            <a:off x="640000" y="420000"/>
-            <a:ext cx="10912000" cy="420000"/>
+            <a:off x="10652000" y="380000"/>
+            <a:ext cx="900000" cy="800000"/>
           </a:xfrm>
           <a:prstGeom prst="rect">
             <a:avLst/>
@@ -3908,17 +3908,17 @@
           <a:p>
             <a:pPr>
               <a:spcAft>
-                <a:spcPts val="810"/>
-              </a:spcAft>
-            </a:pPr>
-            <a:r>
-              <a:rPr sz="1800" b="1">
+                <a:spcPts val="1980"/>
+              </a:spcAft>
+            </a:pPr>
+            <a:r>
+              <a:rPr sz="4400" b="0">
                 <a:solidFill>
                   <a:srgbClr val="1F2A44"/>
                 </a:solidFill>
                 <a:latin typeface="Nunito Sans"/>
               </a:rPr>
-              <a:t>🦉 Aula de Filosofía</a:t>
+              <a:t>🙃</a:t>
             </a:r>
           </a:p>
         </p:txBody>

--- a/curso/pptx/S41.pptx
+++ b/curso/pptx/S41.pptx
@@ -473,426 +473,6 @@
     </a:lvl9pPr>
   </p:notesStyle>
 </p:notesMaster>
-</file>
-
-<file path=ppt/notesSlides/notesSlide1.xml><?xml version="1.0" encoding="utf-8"?>
-<p:notes xmlns:a="http://schemas.openxmlformats.org/drawingml/2006/main" xmlns:p="http://schemas.openxmlformats.org/presentationml/2006/main" xmlns:r="http://schemas.openxmlformats.org/officeDocument/2006/relationships">
-  <p:cSld>
-    <p:spTree>
-      <p:nvGrpSpPr>
-        <p:cNvPr id="1" name=""/>
-        <p:cNvGrpSpPr/>
-        <p:nvPr/>
-      </p:nvGrpSpPr>
-      <p:grpSpPr>
-        <a:xfrm>
-          <a:off x="0" y="0"/>
-          <a:ext cx="0" cy="0"/>
-          <a:chOff x="0" y="0"/>
-          <a:chExt cx="0" cy="0"/>
-        </a:xfrm>
-      </p:grpSpPr>
-      <p:sp>
-        <p:nvSpPr>
-          <p:cNvPr id="2" name="Slide Image Placeholder 1"/>
-          <p:cNvSpPr>
-            <a:spLocks noGrp="1"/>
-          </p:cNvSpPr>
-          <p:nvPr>
-            <p:ph type="sldImg" idx="2"/>
-          </p:nvPr>
-        </p:nvSpPr>
-        <p:spPr/>
-      </p:sp>
-      <p:sp>
-        <p:nvSpPr>
-          <p:cNvPr id="3" name="Notes Placeholder 2"/>
-          <p:cNvSpPr>
-            <a:spLocks noGrp="1"/>
-          </p:cNvSpPr>
-          <p:nvPr>
-            <p:ph type="body" idx="3" sz="quarter"/>
-          </p:nvPr>
-        </p:nvSpPr>
-        <p:spPr/>
-        <p:txBody>
-          <a:bodyPr/>
-          <a:lstStyle/>
-          <a:p>
-            <a:r>
-              <a:t>3 minutos. Sin apuntes. Es para recordar, no cuenta para nota.</a:t>
-            </a:r>
-          </a:p>
-        </p:txBody>
-      </p:sp>
-      <p:sp>
-        <p:nvSpPr>
-          <p:cNvPr id="4" name="Slide Number Placeholder 3"/>
-          <p:cNvSpPr>
-            <a:spLocks noGrp="1"/>
-          </p:cNvSpPr>
-          <p:nvPr>
-            <p:ph type="sldNum" idx="5" sz="quarter"/>
-          </p:nvPr>
-        </p:nvSpPr>
-        <p:spPr/>
-      </p:sp>
-    </p:spTree>
-  </p:cSld>
-  <p:clrMapOvr>
-    <a:masterClrMapping/>
-  </p:clrMapOvr>
-</p:notes>
-</file>
-
-<file path=ppt/notesSlides/notesSlide2.xml><?xml version="1.0" encoding="utf-8"?>
-<p:notes xmlns:a="http://schemas.openxmlformats.org/drawingml/2006/main" xmlns:p="http://schemas.openxmlformats.org/presentationml/2006/main" xmlns:r="http://schemas.openxmlformats.org/officeDocument/2006/relationships">
-  <p:cSld>
-    <p:spTree>
-      <p:nvGrpSpPr>
-        <p:cNvPr id="1" name=""/>
-        <p:cNvGrpSpPr/>
-        <p:nvPr/>
-      </p:nvGrpSpPr>
-      <p:grpSpPr>
-        <a:xfrm>
-          <a:off x="0" y="0"/>
-          <a:ext cx="0" cy="0"/>
-          <a:chOff x="0" y="0"/>
-          <a:chExt cx="0" cy="0"/>
-        </a:xfrm>
-      </p:grpSpPr>
-      <p:sp>
-        <p:nvSpPr>
-          <p:cNvPr id="2" name="Slide Image Placeholder 1"/>
-          <p:cNvSpPr>
-            <a:spLocks noGrp="1"/>
-          </p:cNvSpPr>
-          <p:nvPr>
-            <p:ph type="sldImg" idx="2"/>
-          </p:nvPr>
-        </p:nvSpPr>
-        <p:spPr/>
-      </p:sp>
-      <p:sp>
-        <p:nvSpPr>
-          <p:cNvPr id="3" name="Notes Placeholder 2"/>
-          <p:cNvSpPr>
-            <a:spLocks noGrp="1"/>
-          </p:cNvSpPr>
-          <p:nvPr>
-            <p:ph type="body" idx="3" sz="quarter"/>
-          </p:nvPr>
-        </p:nvSpPr>
-        <p:spPr/>
-        <p:txBody>
-          <a:bodyPr/>
-          <a:lstStyle/>
-          <a:p>
-            <a:r>
-              <a:t>3 minutos. Sin apuntes. Es para recordar, no cuenta para nota.</a:t>
-            </a:r>
-          </a:p>
-        </p:txBody>
-      </p:sp>
-      <p:sp>
-        <p:nvSpPr>
-          <p:cNvPr id="4" name="Slide Number Placeholder 3"/>
-          <p:cNvSpPr>
-            <a:spLocks noGrp="1"/>
-          </p:cNvSpPr>
-          <p:nvPr>
-            <p:ph type="sldNum" idx="5" sz="quarter"/>
-          </p:nvPr>
-        </p:nvSpPr>
-        <p:spPr/>
-      </p:sp>
-    </p:spTree>
-  </p:cSld>
-  <p:clrMapOvr>
-    <a:masterClrMapping/>
-  </p:clrMapOvr>
-</p:notes>
-</file>
-
-<file path=ppt/notesSlides/notesSlide3.xml><?xml version="1.0" encoding="utf-8"?>
-<p:notes xmlns:a="http://schemas.openxmlformats.org/drawingml/2006/main" xmlns:p="http://schemas.openxmlformats.org/presentationml/2006/main" xmlns:r="http://schemas.openxmlformats.org/officeDocument/2006/relationships">
-  <p:cSld>
-    <p:spTree>
-      <p:nvGrpSpPr>
-        <p:cNvPr id="1" name=""/>
-        <p:cNvGrpSpPr/>
-        <p:nvPr/>
-      </p:nvGrpSpPr>
-      <p:grpSpPr>
-        <a:xfrm>
-          <a:off x="0" y="0"/>
-          <a:ext cx="0" cy="0"/>
-          <a:chOff x="0" y="0"/>
-          <a:chExt cx="0" cy="0"/>
-        </a:xfrm>
-      </p:grpSpPr>
-      <p:sp>
-        <p:nvSpPr>
-          <p:cNvPr id="2" name="Slide Image Placeholder 1"/>
-          <p:cNvSpPr>
-            <a:spLocks noGrp="1"/>
-          </p:cNvSpPr>
-          <p:nvPr>
-            <p:ph type="sldImg" idx="2"/>
-          </p:nvPr>
-        </p:nvSpPr>
-        <p:spPr/>
-      </p:sp>
-      <p:sp>
-        <p:nvSpPr>
-          <p:cNvPr id="3" name="Notes Placeholder 2"/>
-          <p:cNvSpPr>
-            <a:spLocks noGrp="1"/>
-          </p:cNvSpPr>
-          <p:nvPr>
-            <p:ph type="body" idx="3" sz="quarter"/>
-          </p:nvPr>
-        </p:nvSpPr>
-        <p:spPr/>
-        <p:txBody>
-          <a:bodyPr/>
-          <a:lstStyle/>
-          <a:p>
-            <a:r>
-              <a:t>Nadie tiene que contestar: solo pensarlo.</a:t>
-            </a:r>
-          </a:p>
-        </p:txBody>
-      </p:sp>
-      <p:sp>
-        <p:nvSpPr>
-          <p:cNvPr id="4" name="Slide Number Placeholder 3"/>
-          <p:cNvSpPr>
-            <a:spLocks noGrp="1"/>
-          </p:cNvSpPr>
-          <p:nvPr>
-            <p:ph type="sldNum" idx="5" sz="quarter"/>
-          </p:nvPr>
-        </p:nvSpPr>
-        <p:spPr/>
-      </p:sp>
-    </p:spTree>
-  </p:cSld>
-  <p:clrMapOvr>
-    <a:masterClrMapping/>
-  </p:clrMapOvr>
-</p:notes>
-</file>
-
-<file path=ppt/notesSlides/notesSlide4.xml><?xml version="1.0" encoding="utf-8"?>
-<p:notes xmlns:a="http://schemas.openxmlformats.org/drawingml/2006/main" xmlns:p="http://schemas.openxmlformats.org/presentationml/2006/main" xmlns:r="http://schemas.openxmlformats.org/officeDocument/2006/relationships">
-  <p:cSld>
-    <p:spTree>
-      <p:nvGrpSpPr>
-        <p:cNvPr id="1" name=""/>
-        <p:cNvGrpSpPr/>
-        <p:nvPr/>
-      </p:nvGrpSpPr>
-      <p:grpSpPr>
-        <a:xfrm>
-          <a:off x="0" y="0"/>
-          <a:ext cx="0" cy="0"/>
-          <a:chOff x="0" y="0"/>
-          <a:chExt cx="0" cy="0"/>
-        </a:xfrm>
-      </p:grpSpPr>
-      <p:sp>
-        <p:nvSpPr>
-          <p:cNvPr id="2" name="Slide Image Placeholder 1"/>
-          <p:cNvSpPr>
-            <a:spLocks noGrp="1"/>
-          </p:cNvSpPr>
-          <p:nvPr>
-            <p:ph type="sldImg" idx="2"/>
-          </p:nvPr>
-        </p:nvSpPr>
-        <p:spPr/>
-      </p:sp>
-      <p:sp>
-        <p:nvSpPr>
-          <p:cNvPr id="3" name="Notes Placeholder 2"/>
-          <p:cNvSpPr>
-            <a:spLocks noGrp="1"/>
-          </p:cNvSpPr>
-          <p:nvPr>
-            <p:ph type="body" idx="3" sz="quarter"/>
-          </p:nvPr>
-        </p:nvSpPr>
-        <p:spPr/>
-        <p:txBody>
-          <a:bodyPr/>
-          <a:lstStyle/>
-          <a:p>
-            <a:r>
-              <a:t>Dejar unos segundos para que piensen la respuesta fácil antes de enseñar los pasos.</a:t>
-            </a:r>
-          </a:p>
-        </p:txBody>
-      </p:sp>
-      <p:sp>
-        <p:nvSpPr>
-          <p:cNvPr id="4" name="Slide Number Placeholder 3"/>
-          <p:cNvSpPr>
-            <a:spLocks noGrp="1"/>
-          </p:cNvSpPr>
-          <p:nvPr>
-            <p:ph type="sldNum" idx="5" sz="quarter"/>
-          </p:nvPr>
-        </p:nvSpPr>
-        <p:spPr/>
-      </p:sp>
-    </p:spTree>
-  </p:cSld>
-  <p:clrMapOvr>
-    <a:masterClrMapping/>
-  </p:clrMapOvr>
-</p:notes>
-</file>
-
-<file path=ppt/notesSlides/notesSlide5.xml><?xml version="1.0" encoding="utf-8"?>
-<p:notes xmlns:a="http://schemas.openxmlformats.org/drawingml/2006/main" xmlns:p="http://schemas.openxmlformats.org/presentationml/2006/main" xmlns:r="http://schemas.openxmlformats.org/officeDocument/2006/relationships">
-  <p:cSld>
-    <p:spTree>
-      <p:nvGrpSpPr>
-        <p:cNvPr id="1" name=""/>
-        <p:cNvGrpSpPr/>
-        <p:nvPr/>
-      </p:nvGrpSpPr>
-      <p:grpSpPr>
-        <a:xfrm>
-          <a:off x="0" y="0"/>
-          <a:ext cx="0" cy="0"/>
-          <a:chOff x="0" y="0"/>
-          <a:chExt cx="0" cy="0"/>
-        </a:xfrm>
-      </p:grpSpPr>
-      <p:sp>
-        <p:nvSpPr>
-          <p:cNvPr id="2" name="Slide Image Placeholder 1"/>
-          <p:cNvSpPr>
-            <a:spLocks noGrp="1"/>
-          </p:cNvSpPr>
-          <p:nvPr>
-            <p:ph type="sldImg" idx="2"/>
-          </p:nvPr>
-        </p:nvSpPr>
-        <p:spPr/>
-      </p:sp>
-      <p:sp>
-        <p:nvSpPr>
-          <p:cNvPr id="3" name="Notes Placeholder 2"/>
-          <p:cNvSpPr>
-            <a:spLocks noGrp="1"/>
-          </p:cNvSpPr>
-          <p:nvPr>
-            <p:ph type="body" idx="3" sz="quarter"/>
-          </p:nvPr>
-        </p:nvSpPr>
-        <p:spPr/>
-        <p:txBody>
-          <a:bodyPr/>
-          <a:lstStyle/>
-          <a:p>
-            <a:r>
-              <a:t>Dejar 2 minutos para que lo escriban. La diapositiva siguiente muestra el resumen.</a:t>
-            </a:r>
-          </a:p>
-        </p:txBody>
-      </p:sp>
-      <p:sp>
-        <p:nvSpPr>
-          <p:cNvPr id="4" name="Slide Number Placeholder 3"/>
-          <p:cNvSpPr>
-            <a:spLocks noGrp="1"/>
-          </p:cNvSpPr>
-          <p:nvPr>
-            <p:ph type="sldNum" idx="5" sz="quarter"/>
-          </p:nvPr>
-        </p:nvSpPr>
-        <p:spPr/>
-      </p:sp>
-    </p:spTree>
-  </p:cSld>
-  <p:clrMapOvr>
-    <a:masterClrMapping/>
-  </p:clrMapOvr>
-</p:notes>
-</file>
-
-<file path=ppt/notesSlides/notesSlide6.xml><?xml version="1.0" encoding="utf-8"?>
-<p:notes xmlns:a="http://schemas.openxmlformats.org/drawingml/2006/main" xmlns:p="http://schemas.openxmlformats.org/presentationml/2006/main" xmlns:r="http://schemas.openxmlformats.org/officeDocument/2006/relationships">
-  <p:cSld>
-    <p:spTree>
-      <p:nvGrpSpPr>
-        <p:cNvPr id="1" name=""/>
-        <p:cNvGrpSpPr/>
-        <p:nvPr/>
-      </p:nvGrpSpPr>
-      <p:grpSpPr>
-        <a:xfrm>
-          <a:off x="0" y="0"/>
-          <a:ext cx="0" cy="0"/>
-          <a:chOff x="0" y="0"/>
-          <a:chExt cx="0" cy="0"/>
-        </a:xfrm>
-      </p:grpSpPr>
-      <p:sp>
-        <p:nvSpPr>
-          <p:cNvPr id="2" name="Slide Image Placeholder 1"/>
-          <p:cNvSpPr>
-            <a:spLocks noGrp="1"/>
-          </p:cNvSpPr>
-          <p:nvPr>
-            <p:ph type="sldImg" idx="2"/>
-          </p:nvPr>
-        </p:nvSpPr>
-        <p:spPr/>
-      </p:sp>
-      <p:sp>
-        <p:nvSpPr>
-          <p:cNvPr id="3" name="Notes Placeholder 2"/>
-          <p:cNvSpPr>
-            <a:spLocks noGrp="1"/>
-          </p:cNvSpPr>
-          <p:nvPr>
-            <p:ph type="body" idx="3" sz="quarter"/>
-          </p:nvPr>
-        </p:nvSpPr>
-        <p:spPr/>
-        <p:txBody>
-          <a:bodyPr/>
-          <a:lstStyle/>
-          <a:p>
-            <a:r>
-              <a:t>Buscar: «la media engaña ejemplo sueldos» · «anécdotas frente a datos»</a:t>
-            </a:r>
-          </a:p>
-        </p:txBody>
-      </p:sp>
-      <p:sp>
-        <p:nvSpPr>
-          <p:cNvPr id="4" name="Slide Number Placeholder 3"/>
-          <p:cNvSpPr>
-            <a:spLocks noGrp="1"/>
-          </p:cNvSpPr>
-          <p:nvPr>
-            <p:ph type="sldNum" idx="5" sz="quarter"/>
-          </p:nvPr>
-        </p:nvSpPr>
-        <p:spPr/>
-      </p:sp>
-    </p:spTree>
-  </p:cSld>
-  <p:clrMapOvr>
-    <a:masterClrMapping/>
-  </p:clrMapOvr>
-</p:notes>
 </file>
 
 <file path=ppt/slideLayouts/slideLayout1.xml><?xml version="1.0" encoding="utf-8"?>

--- a/curso/pptx/S41.pptx
+++ b/curso/pptx/S41.pptx
@@ -4128,7 +4128,7 @@
                 </a:solidFill>
                 <a:latin typeface="Nunito Sans"/>
               </a:rPr>
-              <a:t>Aitor: «Fumar no es tan malo. Mi abuelo fumó toda la vida y vivió 95 años».</a:t>
+              <a:t>Un chico: «Fumar no es tan malo. Mi abuelo fumó toda la vida y vivió 95 años».</a:t>
             </a:r>
           </a:p>
         </p:txBody>
@@ -4437,7 +4437,7 @@
                 </a:solidFill>
                 <a:latin typeface="Nunito Sans"/>
               </a:rPr>
-              <a:t>El entrenador del equipo del barrio: «Kevin marca de media un gol por partido». Han jugado 10 partidos. (Ejemplo inventado.)</a:t>
+              <a:t>El entrenador del equipo del barrio: «Un chico marca de media un gol por partido». Han jugado 10 partidos. (Ejemplo inventado.)</a:t>
             </a:r>
           </a:p>
         </p:txBody>
@@ -5314,7 +5314,7 @@
                 </a:solidFill>
                 <a:latin typeface="Nunito Sans"/>
               </a:rPr>
-              <a:t>Anuncio (inventado): «Con nuestro casco, nunca te harás una herida en la cabeza». Iker se cayó con ese casco puesto y se hizo una herida.</a:t>
+              <a:t>Anuncio (inventado): «Con nuestro casco, nunca te harás una herida en la cabeza». Un chico se cayó con ese casco puesto y se hizo una herida.</a:t>
             </a:r>
           </a:p>
         </p:txBody>
@@ -5455,7 +5455,7 @@
                 </a:solidFill>
                 <a:latin typeface="Nunito Sans"/>
               </a:rPr>
-              <a:t>Si lo de Iker es verdad, el anuncio es falso, aunque el casco proteja mucho.</a:t>
+              <a:t>Si lo del chico es verdad, el anuncio es falso, aunque el casco proteja mucho.</a:t>
             </a:r>
           </a:p>
           <a:p>
@@ -6637,7 +6637,7 @@
                 </a:solidFill>
                 <a:latin typeface="Nunito Sans"/>
               </a:rPr>
-              <a:t>Hoy un experimento como el de Milgram no estaría ______.  (sesión 29)</a:t>
+              <a:t>Hoy un experimento como el de las descargas no estaría ______.  (sesión 29)</a:t>
             </a:r>
           </a:p>
         </p:txBody>
@@ -6875,7 +6875,7 @@
                 </a:solidFill>
                 <a:latin typeface="Nunito Sans"/>
               </a:rPr>
-              <a:t>Hoy un experimento como el de Milgram no estaría </a:t>
+              <a:t>Hoy un experimento como el de las descargas no estaría </a:t>
             </a:r>
             <a:r>
               <a:rPr sz="2600" b="1">
@@ -7632,7 +7632,7 @@
                 </a:solidFill>
                 <a:latin typeface="Fredoka"/>
               </a:rPr>
-              <a:t>Dos clases con media 5 (ejemplo inventado)</a:t>
+              <a:t>Dos institutos con media 5 (ejemplo inventado)</a:t>
             </a:r>
           </a:p>
         </p:txBody>
@@ -7673,7 +7673,7 @@
                           </a:solidFill>
                           <a:latin typeface="Fredoka"/>
                         </a:rPr>
-                        <a:t>Clase</a:t>
+                        <a:t>Instituto</a:t>
                       </a:r>
                     </a:p>
                   </a:txBody>
@@ -7741,7 +7741,7 @@
                           </a:solidFill>
                           <a:latin typeface="Nunito Sans"/>
                         </a:rPr>
-                        <a:t>2.º A</a:t>
+                        <a:t>Instituto A</a:t>
                       </a:r>
                     </a:p>
                   </a:txBody>
@@ -7809,7 +7809,7 @@
                           </a:solidFill>
                           <a:latin typeface="Nunito Sans"/>
                         </a:rPr>
-                        <a:t>2.º B</a:t>
+                        <a:t>Instituto B</a:t>
                       </a:r>
                     </a:p>
                   </a:txBody>
@@ -7921,7 +7921,7 @@
                           </a:solidFill>
                           <a:latin typeface="Nunito Sans"/>
                         </a:rPr>
-                        <a:t>Misma media, clases muy distintas</a:t>
+                        <a:t>Misma media, institutos muy distintos</a:t>
                       </a:r>
                     </a:p>
                   </a:txBody>

--- a/curso/pptx/S41.pptx
+++ b/curso/pptx/S41.pptx
@@ -21,9 +21,6 @@
     <p:sldId id="269" r:id="rId21"/>
     <p:sldId id="270" r:id="rId22"/>
     <p:sldId id="271" r:id="rId23"/>
-    <p:sldId id="272" r:id="rId24"/>
-    <p:sldId id="273" r:id="rId25"/>
-    <p:sldId id="274" r:id="rId26"/>
   </p:sldIdLst>
   <p:sldSz cx="12192000" cy="6858000" type="screen4x3"/>
   <p:notesSz cx="6858000" cy="9144000"/>
@@ -3537,7 +3534,7 @@
                 </a:solidFill>
                 <a:latin typeface="Nunito Sans"/>
               </a:rPr>
-              <a:t>PENSAMIENTO CRÍTICO · SESIÓN 41 · UNIDAD 7 · NÚMEROS QUE ENGAÑAN</a:t>
+              <a:t>PENSAMIENTO CRÍTICO · SESIÓN 41 · UNIDAD 7 · EMOCIONES, CONFLICTOS Y DILEMAS</a:t>
             </a:r>
           </a:p>
         </p:txBody>
@@ -3576,7 +3573,7 @@
                 </a:solidFill>
                 <a:latin typeface="Fredoka"/>
               </a:rPr>
-              <a:t>Medias y anécdotas</a:t>
+              <a:t>¿Qué es un dilema ético?</a:t>
             </a:r>
           </a:p>
         </p:txBody>
@@ -3615,7 +3612,7 @@
                 </a:solidFill>
                 <a:latin typeface="Nunito Sans"/>
               </a:rPr>
-              <a:t>La media resume, pero puede esconder diferencias (la mediana ayuda); una anécdota no prueba una regla general, aunque puede tumbar un «siempre».</a:t>
+              <a:t>Un dilema ético es un problema con buenas razones para dos respuestas, porque chocan dos valores. Difícil no quiere decir que todo valga.</a:t>
             </a:r>
           </a:p>
         </p:txBody>
@@ -3634,7 +3631,7 @@
     <p:bg>
       <p:bgPr>
         <a:solidFill>
-          <a:srgbClr val="FBF7EF"/>
+          <a:srgbClr val="1F2A44"/>
         </a:solidFill>
         <a:effectLst/>
       </p:bgPr>
@@ -3654,8 +3651,8 @@
         </p:nvSpPr>
         <p:spPr>
           <a:xfrm>
-            <a:off x="640000" y="380000"/>
-            <a:ext cx="10912000" cy="420000"/>
+            <a:off x="640000" y="2300000"/>
+            <a:ext cx="10912000" cy="500000"/>
           </a:xfrm>
           <a:prstGeom prst="rect">
             <a:avLst/>
@@ -3670,17 +3667,17 @@
           <a:p>
             <a:pPr>
               <a:spcAft>
-                <a:spcPts val="630"/>
+                <a:spcPts val="810"/>
               </a:spcAft>
             </a:pPr>
             <a:r>
-              <a:rPr sz="1400" b="1">
-                <a:solidFill>
-                  <a:srgbClr val="E8793A"/>
-                </a:solidFill>
-                <a:latin typeface="Nunito Sans"/>
-              </a:rPr>
-              <a:t>BLOQUE 2 · CASOS RESUELTOS</a:t>
+              <a:rPr sz="1800" b="1">
+                <a:solidFill>
+                  <a:srgbClr val="F4B183"/>
+                </a:solidFill>
+                <a:latin typeface="Nunito Sans"/>
+              </a:rPr>
+              <a:t>BLOQUE 2</a:t>
             </a:r>
           </a:p>
         </p:txBody>
@@ -3693,7 +3690,7 @@
         </p:nvSpPr>
         <p:spPr>
           <a:xfrm>
-            <a:off x="640000" y="760000"/>
+            <a:off x="640000" y="2800000"/>
             <a:ext cx="10912000" cy="800000"/>
           </a:xfrm>
           <a:prstGeom prst="rect">
@@ -3709,240 +3706,17 @@
           <a:p>
             <a:pPr>
               <a:spcAft>
-                <a:spcPts val="1710"/>
+                <a:spcPts val="2160"/>
               </a:spcAft>
             </a:pPr>
             <a:r>
-              <a:rPr sz="3800" b="1">
-                <a:solidFill>
-                  <a:srgbClr val="1F2A44"/>
+              <a:rPr sz="4800" b="1">
+                <a:solidFill>
+                  <a:srgbClr val="FBF7EF"/>
                 </a:solidFill>
                 <a:latin typeface="Fredoka"/>
               </a:rPr>
-              <a:t>Caso 1 · El sueldo del principio</a:t>
-            </a:r>
-          </a:p>
-        </p:txBody>
-      </p:sp>
-      <p:sp>
-        <p:nvSpPr>
-          <p:cNvPr id="4" name="Rectangle 3"/>
-          <p:cNvSpPr/>
-          <p:nvPr/>
-        </p:nvSpPr>
-        <p:spPr>
-          <a:xfrm>
-            <a:off x="640000" y="1600000"/>
-            <a:ext cx="10912000" cy="1100000"/>
-          </a:xfrm>
-          <a:prstGeom prst="rect">
-            <a:avLst/>
-          </a:prstGeom>
-          <a:solidFill>
-            <a:srgbClr val="FFFFFF"/>
-          </a:solidFill>
-          <a:ln>
-            <a:noFill/>
-          </a:ln>
-        </p:spPr>
-        <p:style>
-          <a:lnRef idx="1">
-            <a:schemeClr val="accent1"/>
-          </a:lnRef>
-          <a:fillRef idx="3">
-            <a:schemeClr val="accent1"/>
-          </a:fillRef>
-          <a:effectRef idx="2">
-            <a:schemeClr val="accent1"/>
-          </a:effectRef>
-          <a:fontRef idx="minor">
-            <a:schemeClr val="lt1"/>
-          </a:fontRef>
-        </p:style>
-        <p:txBody>
-          <a:bodyPr rtlCol="0" anchor="ctr"/>
-          <a:lstStyle/>
-          <a:p>
-            <a:pPr algn="ctr"/>
-          </a:p>
-        </p:txBody>
-      </p:sp>
-      <p:sp>
-        <p:nvSpPr>
-          <p:cNvPr id="5" name="TextBox 4"/>
-          <p:cNvSpPr txBox="1"/>
-          <p:nvPr/>
-        </p:nvSpPr>
-        <p:spPr>
-          <a:xfrm>
-            <a:off x="840000" y="1650000"/>
-            <a:ext cx="10512000" cy="1000000"/>
-          </a:xfrm>
-          <a:prstGeom prst="rect">
-            <a:avLst/>
-          </a:prstGeom>
-          <a:noFill/>
-        </p:spPr>
-        <p:txBody>
-          <a:bodyPr wrap="square" anchor="ctr">
-            <a:spAutoFit/>
-          </a:bodyPr>
-          <a:lstStyle/>
-          <a:p>
-            <a:pPr>
-              <a:spcAft>
-                <a:spcPts val="1170"/>
-              </a:spcAft>
-            </a:pPr>
-            <a:r>
-              <a:rPr sz="2600" b="1">
-                <a:solidFill>
-                  <a:srgbClr val="1F2A44"/>
-                </a:solidFill>
-                <a:latin typeface="Nunito Sans"/>
-              </a:rPr>
-              <a:t>Empresa inventada: el jefe cobra 20.000 € al mes y cada uno de los cuatro empleados, 1.250 €.</a:t>
-            </a:r>
-          </a:p>
-        </p:txBody>
-      </p:sp>
-      <p:sp>
-        <p:nvSpPr>
-          <p:cNvPr id="6" name="TextBox 5"/>
-          <p:cNvSpPr txBox="1"/>
-          <p:nvPr/>
-        </p:nvSpPr>
-        <p:spPr>
-          <a:xfrm>
-            <a:off x="640000" y="2900000"/>
-            <a:ext cx="10912000" cy="3500000"/>
-          </a:xfrm>
-          <a:prstGeom prst="rect">
-            <a:avLst/>
-          </a:prstGeom>
-          <a:noFill/>
-        </p:spPr>
-        <p:txBody>
-          <a:bodyPr wrap="square">
-            <a:spAutoFit/>
-          </a:bodyPr>
-          <a:lstStyle/>
-          <a:p>
-            <a:pPr>
-              <a:spcAft>
-                <a:spcPts val="1080"/>
-              </a:spcAft>
-            </a:pPr>
-            <a:r>
-              <a:rPr sz="2400" b="1">
-                <a:solidFill>
-                  <a:srgbClr val="E8793A"/>
-                </a:solidFill>
-                <a:latin typeface="Nunito Sans"/>
-              </a:rPr>
-              <a:t>1. </a:t>
-            </a:r>
-            <a:r>
-              <a:rPr sz="2400" b="0">
-                <a:solidFill>
-                  <a:srgbClr val="1F2A44"/>
-                </a:solidFill>
-                <a:latin typeface="Nunito Sans"/>
-              </a:rPr>
-              <a:t>Sumo y divido: 20.000 + 4 × 1.250 = 25.000 €; 25.000 : 5 = 5.000 €. La media es verdad.</a:t>
-            </a:r>
-          </a:p>
-          <a:p>
-            <a:pPr>
-              <a:spcAft>
-                <a:spcPts val="1080"/>
-              </a:spcAft>
-            </a:pPr>
-            <a:r>
-              <a:rPr sz="2400" b="1">
-                <a:solidFill>
-                  <a:srgbClr val="E8793A"/>
-                </a:solidFill>
-                <a:latin typeface="Nunito Sans"/>
-              </a:rPr>
-              <a:t>2. </a:t>
-            </a:r>
-            <a:r>
-              <a:rPr sz="2400" b="0">
-                <a:solidFill>
-                  <a:srgbClr val="1F2A44"/>
-                </a:solidFill>
-                <a:latin typeface="Nunito Sans"/>
-              </a:rPr>
-              <a:t>Pero ningún empleado cobra 5.000 €: el sueldo del jefe tira de la media hacia arriba.</a:t>
-            </a:r>
-          </a:p>
-          <a:p>
-            <a:pPr>
-              <a:spcAft>
-                <a:spcPts val="1080"/>
-              </a:spcAft>
-            </a:pPr>
-            <a:r>
-              <a:rPr sz="2400" b="1">
-                <a:solidFill>
-                  <a:srgbClr val="E8793A"/>
-                </a:solidFill>
-                <a:latin typeface="Nunito Sans"/>
-              </a:rPr>
-              <a:t>3. </a:t>
-            </a:r>
-            <a:r>
-              <a:rPr sz="2400" b="0">
-                <a:solidFill>
-                  <a:srgbClr val="1F2A44"/>
-                </a:solidFill>
-                <a:latin typeface="Nunito Sans"/>
-              </a:rPr>
-              <a:t>Ordeno: 1.250, 1.250, </a:t>
-            </a:r>
-            <a:r>
-              <a:rPr sz="2400" b="1">
-                <a:solidFill>
-                  <a:srgbClr val="1F2A44"/>
-                </a:solidFill>
-                <a:latin typeface="Nunito Sans"/>
-              </a:rPr>
-              <a:t>1.250</a:t>
-            </a:r>
-            <a:r>
-              <a:rPr sz="2400" b="0">
-                <a:solidFill>
-                  <a:srgbClr val="1F2A44"/>
-                </a:solidFill>
-                <a:latin typeface="Nunito Sans"/>
-              </a:rPr>
-              <a:t>, 1.250, 20.000. La mediana, el dato del medio, es 1.250 €.</a:t>
-            </a:r>
-          </a:p>
-          <a:p>
-            <a:pPr>
-              <a:spcAft>
-                <a:spcPts val="1080"/>
-              </a:spcAft>
-            </a:pPr>
-            <a:r>
-              <a:rPr sz="2400" b="1">
-                <a:solidFill>
-                  <a:srgbClr val="E8793A"/>
-                </a:solidFill>
-                <a:latin typeface="Nunito Sans"/>
-              </a:rPr>
-              <a:t>4. </a:t>
-            </a:r>
-            <a:r>
-              <a:rPr sz="2400" b="0">
-                <a:solidFill>
-                  <a:srgbClr val="1F2A44"/>
-                </a:solidFill>
-                <a:latin typeface="Nunito Sans"/>
-              </a:rPr>
-              <a:t>Conclusión: un dato muy grande deforma la media. Aquí la mediana dice mejor lo que cobra la mayoría.</a:t>
+              <a:t>Casos resueltos</a:t>
             </a:r>
           </a:p>
         </p:txBody>
@@ -4046,7 +3820,7 @@
                 </a:solidFill>
                 <a:latin typeface="Fredoka"/>
               </a:rPr>
-              <a:t>Caso 2 · El abuelo fumador</a:t>
+              <a:t>Caso 1 · La amiga que copia</a:t>
             </a:r>
           </a:p>
         </p:txBody>
@@ -4128,7 +3902,7 @@
                 </a:solidFill>
                 <a:latin typeface="Nunito Sans"/>
               </a:rPr>
-              <a:t>Un chico: «Fumar no es tan malo. Mi abuelo fumó toda la vida y vivió 95 años».</a:t>
+              <a:t>Una chica vio a su mejor amiga copiar en un examen. La profesora le pregunta si vio algo. (Ejemplo inventado.)</a:t>
             </a:r>
           </a:p>
         </p:txBody>
@@ -4176,7 +3950,43 @@
                 </a:solidFill>
                 <a:latin typeface="Nunito Sans"/>
               </a:rPr>
-              <a:t>¿Es verdad lo del abuelo? Puede que sí.</a:t>
+              <a:t>¿Qué valores chocan? La </a:t>
+            </a:r>
+            <a:r>
+              <a:rPr sz="2400" b="1">
+                <a:solidFill>
+                  <a:srgbClr val="1F2A44"/>
+                </a:solidFill>
+                <a:latin typeface="Nunito Sans"/>
+              </a:rPr>
+              <a:t>lealtad</a:t>
+            </a:r>
+            <a:r>
+              <a:rPr sz="2400" b="0">
+                <a:solidFill>
+                  <a:srgbClr val="1F2A44"/>
+                </a:solidFill>
+                <a:latin typeface="Nunito Sans"/>
+              </a:rPr>
+              <a:t> con su amiga y la </a:t>
+            </a:r>
+            <a:r>
+              <a:rPr sz="2400" b="1">
+                <a:solidFill>
+                  <a:srgbClr val="1F2A44"/>
+                </a:solidFill>
+                <a:latin typeface="Nunito Sans"/>
+              </a:rPr>
+              <a:t>justicia</a:t>
+            </a:r>
+            <a:r>
+              <a:rPr sz="2400" b="0">
+                <a:solidFill>
+                  <a:srgbClr val="1F2A44"/>
+                </a:solidFill>
+                <a:latin typeface="Nunito Sans"/>
+              </a:rPr>
+              <a:t> con quienes estudiaron.</a:t>
             </a:r>
           </a:p>
           <a:p>
@@ -4201,7 +4011,7 @@
                 </a:solidFill>
                 <a:latin typeface="Nunito Sans"/>
               </a:rPr>
-              <a:t>¿Es suficiente? No: es un caso entre millones de fumadores.</a:t>
+              <a:t>Razones para callar: es su amiga, no quiere hacerle daño ni que la vean como chivata.</a:t>
             </a:r>
           </a:p>
           <a:p>
@@ -4226,7 +4036,7 @@
                 </a:solidFill>
                 <a:latin typeface="Nunito Sans"/>
               </a:rPr>
-              <a:t>Los datos no dicen que «todos» los fumadores mueren jóvenes: dicen que, de media, viven bastantes años menos.</a:t>
+              <a:t>Razones para contarlo: no es justo para los demás, y mentir a la profesora también cuesta.</a:t>
             </a:r>
           </a:p>
           <a:p>
@@ -4251,7 +4061,7 @@
                 </a:solidFill>
                 <a:latin typeface="Nunito Sans"/>
               </a:rPr>
-              <a:t>Conclusión: el abuelo solo tumbaría «todos los fumadores mueren jóvenes», y los datos no dicen eso. Una anécdota no los tumba.</a:t>
+              <a:t>Conclusión: hay buenas razones en los dos lados. Por eso es un dilema y no un capricho.</a:t>
             </a:r>
           </a:p>
         </p:txBody>
@@ -4265,6 +4075,358 @@
 </file>
 
 <file path=ppt/slides/slide12.xml><?xml version="1.0" encoding="utf-8"?>
+<p:sld xmlns:a="http://schemas.openxmlformats.org/drawingml/2006/main" xmlns:p="http://schemas.openxmlformats.org/presentationml/2006/main" xmlns:r="http://schemas.openxmlformats.org/officeDocument/2006/relationships">
+  <p:cSld>
+    <p:bg>
+      <p:bgPr>
+        <a:solidFill>
+          <a:srgbClr val="F6C9A8"/>
+        </a:solidFill>
+        <a:effectLst/>
+      </p:bgPr>
+    </p:bg>
+    <p:spTree>
+      <p:nvGrpSpPr>
+        <p:cNvPr id="1" name=""/>
+        <p:cNvGrpSpPr/>
+        <p:nvPr/>
+      </p:nvGrpSpPr>
+      <p:grpSpPr/>
+      <p:sp>
+        <p:nvSpPr>
+          <p:cNvPr id="2" name="TextBox 1"/>
+          <p:cNvSpPr txBox="1"/>
+          <p:nvPr/>
+        </p:nvSpPr>
+        <p:spPr>
+          <a:xfrm>
+            <a:off x="640000" y="380000"/>
+            <a:ext cx="10912000" cy="420000"/>
+          </a:xfrm>
+          <a:prstGeom prst="rect">
+            <a:avLst/>
+          </a:prstGeom>
+          <a:noFill/>
+        </p:spPr>
+        <p:txBody>
+          <a:bodyPr wrap="square">
+            <a:spAutoFit/>
+          </a:bodyPr>
+          <a:lstStyle/>
+          <a:p>
+            <a:pPr>
+              <a:spcAft>
+                <a:spcPts val="630"/>
+              </a:spcAft>
+            </a:pPr>
+            <a:r>
+              <a:rPr sz="1400" b="1">
+                <a:solidFill>
+                  <a:srgbClr val="1F2A44"/>
+                </a:solidFill>
+                <a:latin typeface="Nunito Sans"/>
+              </a:rPr>
+              <a:t>CASO TRAMPA · BLOQUE 2 · CASOS RESUELTOS</a:t>
+            </a:r>
+          </a:p>
+        </p:txBody>
+      </p:sp>
+      <p:sp>
+        <p:nvSpPr>
+          <p:cNvPr id="3" name="TextBox 2"/>
+          <p:cNvSpPr txBox="1"/>
+          <p:nvPr/>
+        </p:nvSpPr>
+        <p:spPr>
+          <a:xfrm>
+            <a:off x="640000" y="760000"/>
+            <a:ext cx="10912000" cy="800000"/>
+          </a:xfrm>
+          <a:prstGeom prst="rect">
+            <a:avLst/>
+          </a:prstGeom>
+          <a:noFill/>
+        </p:spPr>
+        <p:txBody>
+          <a:bodyPr wrap="square">
+            <a:spAutoFit/>
+          </a:bodyPr>
+          <a:lstStyle/>
+          <a:p>
+            <a:pPr>
+              <a:spcAft>
+                <a:spcPts val="1710"/>
+              </a:spcAft>
+            </a:pPr>
+            <a:r>
+              <a:rPr sz="3800" b="1">
+                <a:solidFill>
+                  <a:srgbClr val="1F2A44"/>
+                </a:solidFill>
+                <a:latin typeface="Fredoka"/>
+              </a:rPr>
+              <a:t>⚠ ¿Cada uno lo suyo?</a:t>
+            </a:r>
+          </a:p>
+        </p:txBody>
+      </p:sp>
+      <p:sp>
+        <p:nvSpPr>
+          <p:cNvPr id="4" name="Rectangle 3"/>
+          <p:cNvSpPr/>
+          <p:nvPr/>
+        </p:nvSpPr>
+        <p:spPr>
+          <a:xfrm>
+            <a:off x="640000" y="1600000"/>
+            <a:ext cx="10912000" cy="1100000"/>
+          </a:xfrm>
+          <a:prstGeom prst="rect">
+            <a:avLst/>
+          </a:prstGeom>
+          <a:solidFill>
+            <a:srgbClr val="FBF7EF"/>
+          </a:solidFill>
+          <a:ln>
+            <a:noFill/>
+          </a:ln>
+        </p:spPr>
+        <p:style>
+          <a:lnRef idx="1">
+            <a:schemeClr val="accent1"/>
+          </a:lnRef>
+          <a:fillRef idx="3">
+            <a:schemeClr val="accent1"/>
+          </a:fillRef>
+          <a:effectRef idx="2">
+            <a:schemeClr val="accent1"/>
+          </a:effectRef>
+          <a:fontRef idx="minor">
+            <a:schemeClr val="lt1"/>
+          </a:fontRef>
+        </p:style>
+        <p:txBody>
+          <a:bodyPr rtlCol="0" anchor="ctr"/>
+          <a:lstStyle/>
+          <a:p>
+            <a:pPr algn="ctr"/>
+          </a:p>
+        </p:txBody>
+      </p:sp>
+      <p:sp>
+        <p:nvSpPr>
+          <p:cNvPr id="5" name="TextBox 4"/>
+          <p:cNvSpPr txBox="1"/>
+          <p:nvPr/>
+        </p:nvSpPr>
+        <p:spPr>
+          <a:xfrm>
+            <a:off x="840000" y="1650000"/>
+            <a:ext cx="10512000" cy="1000000"/>
+          </a:xfrm>
+          <a:prstGeom prst="rect">
+            <a:avLst/>
+          </a:prstGeom>
+          <a:noFill/>
+        </p:spPr>
+        <p:txBody>
+          <a:bodyPr wrap="square" anchor="ctr">
+            <a:spAutoFit/>
+          </a:bodyPr>
+          <a:lstStyle/>
+          <a:p>
+            <a:pPr>
+              <a:spcAft>
+                <a:spcPts val="1170"/>
+              </a:spcAft>
+            </a:pPr>
+            <a:r>
+              <a:rPr sz="2600" b="1">
+                <a:solidFill>
+                  <a:srgbClr val="1F2A44"/>
+                </a:solidFill>
+                <a:latin typeface="Nunito Sans"/>
+              </a:rPr>
+              <a:t>Un chico dice: «En un dilema no hay respuesta mejor ni peor. Cada uno piensa lo que quiere, como con los gustos».</a:t>
+            </a:r>
+          </a:p>
+        </p:txBody>
+      </p:sp>
+      <p:sp>
+        <p:nvSpPr>
+          <p:cNvPr id="6" name="TextBox 5"/>
+          <p:cNvSpPr txBox="1"/>
+          <p:nvPr/>
+        </p:nvSpPr>
+        <p:spPr>
+          <a:xfrm>
+            <a:off x="640000" y="2900000"/>
+            <a:ext cx="10912000" cy="3500000"/>
+          </a:xfrm>
+          <a:prstGeom prst="rect">
+            <a:avLst/>
+          </a:prstGeom>
+          <a:noFill/>
+        </p:spPr>
+        <p:txBody>
+          <a:bodyPr wrap="square">
+            <a:spAutoFit/>
+          </a:bodyPr>
+          <a:lstStyle/>
+          <a:p>
+            <a:pPr>
+              <a:spcAft>
+                <a:spcPts val="1080"/>
+              </a:spcAft>
+            </a:pPr>
+            <a:r>
+              <a:rPr sz="2400" b="1">
+                <a:solidFill>
+                  <a:srgbClr val="E8793A"/>
+                </a:solidFill>
+                <a:latin typeface="Nunito Sans"/>
+              </a:rPr>
+              <a:t>1. </a:t>
+            </a:r>
+            <a:r>
+              <a:rPr sz="2400" b="0">
+                <a:solidFill>
+                  <a:srgbClr val="1F2A44"/>
+                </a:solidFill>
+                <a:latin typeface="Nunito Sans"/>
+              </a:rPr>
+              <a:t>Si hay razones para las dos respuestas, ¿da igual lo que elijas?</a:t>
+            </a:r>
+          </a:p>
+          <a:p>
+            <a:pPr>
+              <a:spcAft>
+                <a:spcPts val="1080"/>
+              </a:spcAft>
+            </a:pPr>
+            <a:r>
+              <a:rPr sz="2400" b="1">
+                <a:solidFill>
+                  <a:srgbClr val="E8793A"/>
+                </a:solidFill>
+                <a:latin typeface="Nunito Sans"/>
+              </a:rPr>
+              <a:t>2. </a:t>
+            </a:r>
+            <a:r>
+              <a:rPr sz="2400" b="0">
+                <a:solidFill>
+                  <a:srgbClr val="1F2A44"/>
+                </a:solidFill>
+                <a:latin typeface="Nunito Sans"/>
+              </a:rPr>
+              <a:t>Parece que sí: los dos lados tienen razones.</a:t>
+            </a:r>
+          </a:p>
+          <a:p>
+            <a:pPr>
+              <a:spcAft>
+                <a:spcPts val="1080"/>
+              </a:spcAft>
+            </a:pPr>
+            <a:r>
+              <a:rPr sz="2400" b="1">
+                <a:solidFill>
+                  <a:srgbClr val="E8793A"/>
+                </a:solidFill>
+                <a:latin typeface="Nunito Sans"/>
+              </a:rPr>
+              <a:t>3. </a:t>
+            </a:r>
+            <a:r>
+              <a:rPr sz="2400" b="0">
+                <a:solidFill>
+                  <a:srgbClr val="1F2A44"/>
+                </a:solidFill>
+                <a:latin typeface="Nunito Sans"/>
+              </a:rPr>
+              <a:t>Pero un dilema no es un gusto: es una opinión sobre qué está bien, y se discute con </a:t>
+            </a:r>
+            <a:r>
+              <a:rPr sz="2400" b="1">
+                <a:solidFill>
+                  <a:srgbClr val="1F2A44"/>
+                </a:solidFill>
+                <a:latin typeface="Nunito Sans"/>
+              </a:rPr>
+              <a:t>razones</a:t>
+            </a:r>
+            <a:r>
+              <a:rPr sz="2400" b="0">
+                <a:solidFill>
+                  <a:srgbClr val="1F2A44"/>
+                </a:solidFill>
+                <a:latin typeface="Nunito Sans"/>
+              </a:rPr>
+              <a:t> (sesión 2).</a:t>
+            </a:r>
+          </a:p>
+          <a:p>
+            <a:pPr>
+              <a:spcAft>
+                <a:spcPts val="1080"/>
+              </a:spcAft>
+            </a:pPr>
+            <a:r>
+              <a:rPr sz="2400" b="1">
+                <a:solidFill>
+                  <a:srgbClr val="E8793A"/>
+                </a:solidFill>
+                <a:latin typeface="Nunito Sans"/>
+              </a:rPr>
+              <a:t>4. </a:t>
+            </a:r>
+            <a:r>
+              <a:rPr sz="2400" b="0">
+                <a:solidFill>
+                  <a:srgbClr val="1F2A44"/>
+                </a:solidFill>
+                <a:latin typeface="Nunito Sans"/>
+              </a:rPr>
+              <a:t>Unas razones pesan más que otras, y algunas son malas: «callo para que luego me deje copiar a mí».</a:t>
+            </a:r>
+          </a:p>
+          <a:p>
+            <a:pPr>
+              <a:spcAft>
+                <a:spcPts val="1080"/>
+              </a:spcAft>
+            </a:pPr>
+            <a:r>
+              <a:rPr sz="2400" b="1">
+                <a:solidFill>
+                  <a:srgbClr val="E8793A"/>
+                </a:solidFill>
+                <a:latin typeface="Nunito Sans"/>
+              </a:rPr>
+              <a:t>5. </a:t>
+            </a:r>
+            <a:r>
+              <a:rPr sz="2400" b="0">
+                <a:solidFill>
+                  <a:srgbClr val="1F2A44"/>
+                </a:solidFill>
+                <a:latin typeface="Nunito Sans"/>
+              </a:rPr>
+              <a:t>Conclusión: que sea difícil no quiere decir que todo valga. Se comparan las razones.</a:t>
+            </a:r>
+          </a:p>
+        </p:txBody>
+      </p:sp>
+    </p:spTree>
+  </p:cSld>
+  <p:clrMapOvr>
+    <a:masterClrMapping/>
+  </p:clrMapOvr>
+</p:sld>
+</file>
+
+<file path=ppt/slides/slide13.xml><?xml version="1.0" encoding="utf-8"?>
 <p:sld xmlns:a="http://schemas.openxmlformats.org/drawingml/2006/main" xmlns:p="http://schemas.openxmlformats.org/presentationml/2006/main" xmlns:r="http://schemas.openxmlformats.org/officeDocument/2006/relationships">
   <p:cSld>
     <p:bg>
@@ -4316,7 +4478,7 @@
                 </a:solidFill>
                 <a:latin typeface="Nunito Sans"/>
               </a:rPr>
-              <a:t>BLOQUE 2 · CASOS RESUELTOS</a:t>
+              <a:t>LO DE HOY EN TRES LÍNEAS</a:t>
             </a:r>
           </a:p>
         </p:txBody>
@@ -4355,64 +4517,21 @@
                 </a:solidFill>
                 <a:latin typeface="Fredoka"/>
               </a:rPr>
-              <a:t>Caso 3 · Un gol por partido</a:t>
-            </a:r>
-          </a:p>
-        </p:txBody>
-      </p:sp>
-      <p:sp>
-        <p:nvSpPr>
-          <p:cNvPr id="4" name="Rectangle 3"/>
-          <p:cNvSpPr/>
-          <p:nvPr/>
-        </p:nvSpPr>
-        <p:spPr>
-          <a:xfrm>
-            <a:off x="640000" y="1600000"/>
-            <a:ext cx="10912000" cy="1100000"/>
-          </a:xfrm>
-          <a:prstGeom prst="rect">
-            <a:avLst/>
-          </a:prstGeom>
-          <a:solidFill>
-            <a:srgbClr val="FFFFFF"/>
-          </a:solidFill>
-          <a:ln>
-            <a:noFill/>
-          </a:ln>
-        </p:spPr>
-        <p:style>
-          <a:lnRef idx="1">
-            <a:schemeClr val="accent1"/>
-          </a:lnRef>
-          <a:fillRef idx="3">
-            <a:schemeClr val="accent1"/>
-          </a:fillRef>
-          <a:effectRef idx="2">
-            <a:schemeClr val="accent1"/>
-          </a:effectRef>
-          <a:fontRef idx="minor">
-            <a:schemeClr val="lt1"/>
-          </a:fontRef>
-        </p:style>
-        <p:txBody>
-          <a:bodyPr rtlCol="0" anchor="ctr"/>
-          <a:lstStyle/>
-          <a:p>
-            <a:pPr algn="ctr"/>
-          </a:p>
-        </p:txBody>
-      </p:sp>
-      <p:sp>
-        <p:nvSpPr>
-          <p:cNvPr id="5" name="TextBox 4"/>
+              <a:t>Escríbelo tú primero, sin mirar</a:t>
+            </a:r>
+          </a:p>
+        </p:txBody>
+      </p:sp>
+      <p:sp>
+        <p:nvSpPr>
+          <p:cNvPr id="4" name="TextBox 3"/>
           <p:cNvSpPr txBox="1"/>
           <p:nvPr/>
         </p:nvSpPr>
         <p:spPr>
           <a:xfrm>
-            <a:off x="840000" y="1650000"/>
-            <a:ext cx="10512000" cy="1000000"/>
+            <a:off x="640000" y="1800000"/>
+            <a:ext cx="10912000" cy="1500000"/>
           </a:xfrm>
           <a:prstGeom prst="rect">
             <a:avLst/>
@@ -4420,7 +4539,7 @@
           <a:noFill/>
         </p:spPr>
         <p:txBody>
-          <a:bodyPr wrap="square" anchor="ctr">
+          <a:bodyPr wrap="square">
             <a:spAutoFit/>
           </a:bodyPr>
           <a:lstStyle/>
@@ -4431,240 +4550,13 @@
               </a:spcAft>
             </a:pPr>
             <a:r>
-              <a:rPr sz="2600" b="1">
-                <a:solidFill>
-                  <a:srgbClr val="1F2A44"/>
-                </a:solidFill>
-                <a:latin typeface="Nunito Sans"/>
-              </a:rPr>
-              <a:t>El entrenador del equipo del barrio: «Un chico marca de media un gol por partido». Han jugado 10 partidos. (Ejemplo inventado.)</a:t>
-            </a:r>
-          </a:p>
-        </p:txBody>
-      </p:sp>
-      <p:sp>
-        <p:nvSpPr>
-          <p:cNvPr id="6" name="TextBox 5"/>
-          <p:cNvSpPr txBox="1"/>
-          <p:nvPr/>
-        </p:nvSpPr>
-        <p:spPr>
-          <a:xfrm>
-            <a:off x="640000" y="2900000"/>
-            <a:ext cx="10912000" cy="3500000"/>
-          </a:xfrm>
-          <a:prstGeom prst="rect">
-            <a:avLst/>
-          </a:prstGeom>
-          <a:noFill/>
-        </p:spPr>
-        <p:txBody>
-          <a:bodyPr wrap="square">
-            <a:spAutoFit/>
-          </a:bodyPr>
-          <a:lstStyle/>
-          <a:p>
-            <a:pPr>
-              <a:spcAft>
-                <a:spcPts val="1080"/>
-              </a:spcAft>
-            </a:pPr>
-            <a:r>
-              <a:rPr sz="2400" b="1">
-                <a:solidFill>
-                  <a:srgbClr val="E8793A"/>
-                </a:solidFill>
-                <a:latin typeface="Nunito Sans"/>
-              </a:rPr>
-              <a:t>1. </a:t>
-            </a:r>
-            <a:r>
-              <a:rPr sz="2400" b="0">
-                <a:solidFill>
-                  <a:srgbClr val="1F2A44"/>
-                </a:solidFill>
-                <a:latin typeface="Nunito Sans"/>
-              </a:rPr>
-              <a:t>¿Marca en cada partido? No lo sé: la media no lo dice.</a:t>
-            </a:r>
-          </a:p>
-          <a:p>
-            <a:pPr>
-              <a:spcAft>
-                <a:spcPts val="1080"/>
-              </a:spcAft>
-            </a:pPr>
-            <a:r>
-              <a:rPr sz="2400" b="1">
-                <a:solidFill>
-                  <a:srgbClr val="E8793A"/>
-                </a:solidFill>
-                <a:latin typeface="Nunito Sans"/>
-              </a:rPr>
-              <a:t>2. </a:t>
-            </a:r>
-            <a:r>
-              <a:rPr sz="2400" b="0">
-                <a:solidFill>
-                  <a:srgbClr val="1F2A44"/>
-                </a:solidFill>
-                <a:latin typeface="Nunito Sans"/>
-              </a:rPr>
-              <a:t>Puede que marcara 10 goles en un partido y 0 en los otros nueve.</a:t>
-            </a:r>
-          </a:p>
-          <a:p>
-            <a:pPr>
-              <a:spcAft>
-                <a:spcPts val="1080"/>
-              </a:spcAft>
-            </a:pPr>
-            <a:r>
-              <a:rPr sz="2400" b="1">
-                <a:solidFill>
-                  <a:srgbClr val="E8793A"/>
-                </a:solidFill>
-                <a:latin typeface="Nunito Sans"/>
-              </a:rPr>
-              <a:t>3. </a:t>
-            </a:r>
-            <a:r>
-              <a:rPr sz="2400" b="0">
-                <a:solidFill>
-                  <a:srgbClr val="1F2A44"/>
-                </a:solidFill>
-                <a:latin typeface="Nunito Sans"/>
-              </a:rPr>
-              <a:t>10 goles : 10 partidos = 1 de media, igual que marcando uno cada día.</a:t>
-            </a:r>
-          </a:p>
-          <a:p>
-            <a:pPr>
-              <a:spcAft>
-                <a:spcPts val="1080"/>
-              </a:spcAft>
-            </a:pPr>
-            <a:r>
-              <a:rPr sz="2400" b="1">
-                <a:solidFill>
-                  <a:srgbClr val="E8793A"/>
-                </a:solidFill>
-                <a:latin typeface="Nunito Sans"/>
-              </a:rPr>
-              <a:t>4. </a:t>
-            </a:r>
-            <a:r>
-              <a:rPr sz="2400" b="0">
-                <a:solidFill>
-                  <a:srgbClr val="1F2A44"/>
-                </a:solidFill>
-                <a:latin typeface="Nunito Sans"/>
-              </a:rPr>
-              <a:t>Conclusión: la misma media puede esconder situaciones muy distintas.</a:t>
-            </a:r>
-          </a:p>
-        </p:txBody>
-      </p:sp>
-    </p:spTree>
-  </p:cSld>
-  <p:clrMapOvr>
-    <a:masterClrMapping/>
-  </p:clrMapOvr>
-</p:sld>
-</file>
-
-<file path=ppt/slides/slide13.xml><?xml version="1.0" encoding="utf-8"?>
-<p:sld xmlns:a="http://schemas.openxmlformats.org/drawingml/2006/main" xmlns:p="http://schemas.openxmlformats.org/presentationml/2006/main" xmlns:r="http://schemas.openxmlformats.org/officeDocument/2006/relationships">
-  <p:cSld>
-    <p:bg>
-      <p:bgPr>
-        <a:solidFill>
-          <a:srgbClr val="1F2A44"/>
-        </a:solidFill>
-        <a:effectLst/>
-      </p:bgPr>
-    </p:bg>
-    <p:spTree>
-      <p:nvGrpSpPr>
-        <p:cNvPr id="1" name=""/>
-        <p:cNvGrpSpPr/>
-        <p:nvPr/>
-      </p:nvGrpSpPr>
-      <p:grpSpPr/>
-      <p:sp>
-        <p:nvSpPr>
-          <p:cNvPr id="2" name="TextBox 1"/>
-          <p:cNvSpPr txBox="1"/>
-          <p:nvPr/>
-        </p:nvSpPr>
-        <p:spPr>
-          <a:xfrm>
-            <a:off x="640000" y="2300000"/>
-            <a:ext cx="10912000" cy="500000"/>
-          </a:xfrm>
-          <a:prstGeom prst="rect">
-            <a:avLst/>
-          </a:prstGeom>
-          <a:noFill/>
-        </p:spPr>
-        <p:txBody>
-          <a:bodyPr wrap="square">
-            <a:spAutoFit/>
-          </a:bodyPr>
-          <a:lstStyle/>
-          <a:p>
-            <a:pPr>
-              <a:spcAft>
-                <a:spcPts val="810"/>
-              </a:spcAft>
-            </a:pPr>
-            <a:r>
-              <a:rPr sz="1800" b="1">
-                <a:solidFill>
-                  <a:srgbClr val="F4B183"/>
-                </a:solidFill>
-                <a:latin typeface="Nunito Sans"/>
-              </a:rPr>
-              <a:t>BLOQUE 3</a:t>
-            </a:r>
-          </a:p>
-        </p:txBody>
-      </p:sp>
-      <p:sp>
-        <p:nvSpPr>
-          <p:cNvPr id="3" name="TextBox 2"/>
-          <p:cNvSpPr txBox="1"/>
-          <p:nvPr/>
-        </p:nvSpPr>
-        <p:spPr>
-          <a:xfrm>
-            <a:off x="640000" y="2800000"/>
-            <a:ext cx="10912000" cy="800000"/>
-          </a:xfrm>
-          <a:prstGeom prst="rect">
-            <a:avLst/>
-          </a:prstGeom>
-          <a:noFill/>
-        </p:spPr>
-        <p:txBody>
-          <a:bodyPr wrap="square">
-            <a:spAutoFit/>
-          </a:bodyPr>
-          <a:lstStyle/>
-          <a:p>
-            <a:pPr>
-              <a:spcAft>
-                <a:spcPts val="2160"/>
-              </a:spcAft>
-            </a:pPr>
-            <a:r>
-              <a:rPr sz="4800" b="1">
-                <a:solidFill>
-                  <a:srgbClr val="FBF7EF"/>
-                </a:solidFill>
-                <a:latin typeface="Fredoka"/>
-              </a:rPr>
-              <a:t>Error típico y caso trampa</a:t>
+              <a:rPr sz="2600" b="0">
+                <a:solidFill>
+                  <a:srgbClr val="4A5568"/>
+                </a:solidFill>
+                <a:latin typeface="Nunito Sans"/>
+              </a:rPr>
+              <a:t>Dos minutos. Después lo comparamos.</a:t>
             </a:r>
           </a:p>
         </p:txBody>
@@ -4729,7 +4621,7 @@
                 </a:solidFill>
                 <a:latin typeface="Nunito Sans"/>
               </a:rPr>
-              <a:t>BLOQUE 3 · ERROR TÍPICO Y CASO TRAMPA</a:t>
+              <a:t>LO DE HOY EN TRES LÍNEAS</a:t>
             </a:r>
           </a:p>
         </p:txBody>
@@ -4742,8 +4634,8 @@
         </p:nvSpPr>
         <p:spPr>
           <a:xfrm>
-            <a:off x="640000" y="760000"/>
-            <a:ext cx="10912000" cy="800000"/>
+            <a:off x="640000" y="1300000"/>
+            <a:ext cx="10912000" cy="4800000"/>
           </a:xfrm>
           <a:prstGeom prst="rect">
             <a:avLst/>
@@ -4758,377 +4650,76 @@
           <a:p>
             <a:pPr>
               <a:spcAft>
-                <a:spcPts val="1710"/>
+                <a:spcPts val="1350"/>
               </a:spcAft>
             </a:pPr>
             <a:r>
-              <a:rPr sz="3800" b="1">
+              <a:rPr sz="3000" b="1">
+                <a:solidFill>
+                  <a:srgbClr val="E8793A"/>
+                </a:solidFill>
+                <a:latin typeface="Nunito Sans"/>
+              </a:rPr>
+              <a:t>1. </a:t>
+            </a:r>
+            <a:r>
+              <a:rPr sz="3000" b="0">
                 <a:solidFill>
                   <a:srgbClr val="1F2A44"/>
                 </a:solidFill>
-                <a:latin typeface="Fredoka"/>
-              </a:rPr>
-              <a:t>¿Qué sirve como prueba?</a:t>
-            </a:r>
-          </a:p>
-        </p:txBody>
-      </p:sp>
-      <p:sp>
-        <p:nvSpPr>
-          <p:cNvPr id="4" name="Rectangle 3"/>
-          <p:cNvSpPr/>
-          <p:nvPr/>
-        </p:nvSpPr>
-        <p:spPr>
-          <a:xfrm>
-            <a:off x="640000" y="1650000"/>
-            <a:ext cx="5306000" cy="4400000"/>
-          </a:xfrm>
-          <a:prstGeom prst="rect">
-            <a:avLst/>
-          </a:prstGeom>
-          <a:solidFill>
-            <a:srgbClr val="FBE3D2"/>
-          </a:solidFill>
-          <a:ln>
-            <a:noFill/>
-          </a:ln>
-        </p:spPr>
-        <p:style>
-          <a:lnRef idx="1">
-            <a:schemeClr val="accent1"/>
-          </a:lnRef>
-          <a:fillRef idx="3">
-            <a:schemeClr val="accent1"/>
-          </a:fillRef>
-          <a:effectRef idx="2">
-            <a:schemeClr val="accent1"/>
-          </a:effectRef>
-          <a:fontRef idx="minor">
-            <a:schemeClr val="lt1"/>
-          </a:fontRef>
-        </p:style>
-        <p:txBody>
-          <a:bodyPr rtlCol="0" anchor="ctr"/>
-          <a:lstStyle/>
-          <a:p>
-            <a:pPr algn="ctr"/>
-          </a:p>
-        </p:txBody>
-      </p:sp>
-      <p:sp>
-        <p:nvSpPr>
-          <p:cNvPr id="5" name="TextBox 4"/>
-          <p:cNvSpPr txBox="1"/>
-          <p:nvPr/>
-        </p:nvSpPr>
-        <p:spPr>
-          <a:xfrm>
-            <a:off x="840000" y="1750000"/>
-            <a:ext cx="4906000" cy="600000"/>
-          </a:xfrm>
-          <a:prstGeom prst="rect">
-            <a:avLst/>
-          </a:prstGeom>
-          <a:noFill/>
-        </p:spPr>
-        <p:txBody>
-          <a:bodyPr wrap="square">
-            <a:spAutoFit/>
-          </a:bodyPr>
-          <a:lstStyle/>
+                <a:latin typeface="Nunito Sans"/>
+              </a:rPr>
+              <a:t>Un dilema ético es un problema con buenas razones para dos respuestas.</a:t>
+            </a:r>
+          </a:p>
           <a:p>
             <a:pPr>
               <a:spcAft>
-                <a:spcPts val="1260"/>
+                <a:spcPts val="1350"/>
               </a:spcAft>
             </a:pPr>
             <a:r>
-              <a:rPr sz="2800" b="1">
-                <a:solidFill>
-                  <a:srgbClr val="C2531C"/>
-                </a:solidFill>
-                <a:latin typeface="Nunito Sans"/>
-              </a:rPr>
-              <a:t>Solo, no basta como prueba</a:t>
-            </a:r>
-          </a:p>
-        </p:txBody>
-      </p:sp>
-      <p:sp>
-        <p:nvSpPr>
-          <p:cNvPr id="6" name="TextBox 5"/>
-          <p:cNvSpPr txBox="1"/>
-          <p:nvPr/>
-        </p:nvSpPr>
-        <p:spPr>
-          <a:xfrm>
-            <a:off x="840000" y="2400000"/>
-            <a:ext cx="4906000" cy="3500000"/>
-          </a:xfrm>
-          <a:prstGeom prst="rect">
-            <a:avLst/>
-          </a:prstGeom>
-          <a:noFill/>
-        </p:spPr>
-        <p:txBody>
-          <a:bodyPr wrap="square">
-            <a:spAutoFit/>
-          </a:bodyPr>
-          <a:lstStyle/>
+              <a:rPr sz="3000" b="1">
+                <a:solidFill>
+                  <a:srgbClr val="E8793A"/>
+                </a:solidFill>
+                <a:latin typeface="Nunito Sans"/>
+              </a:rPr>
+              <a:t>2. </a:t>
+            </a:r>
+            <a:r>
+              <a:rPr sz="3000" b="0">
+                <a:solidFill>
+                  <a:srgbClr val="1F2A44"/>
+                </a:solidFill>
+                <a:latin typeface="Nunito Sans"/>
+              </a:rPr>
+              <a:t>Aparece cuando chocan dos valores, como la lealtad y la justicia.</a:t>
+            </a:r>
+          </a:p>
           <a:p>
             <a:pPr>
               <a:spcAft>
-                <a:spcPts val="1170"/>
+                <a:spcPts val="1350"/>
               </a:spcAft>
             </a:pPr>
             <a:r>
-              <a:rPr sz="2600" b="1">
+              <a:rPr sz="3000" b="1">
                 <a:solidFill>
                   <a:srgbClr val="E8793A"/>
                 </a:solidFill>
                 <a:latin typeface="Nunito Sans"/>
               </a:rPr>
-              <a:t>• </a:t>
-            </a:r>
-            <a:r>
-              <a:rPr sz="2600" b="0">
+              <a:t>3. </a:t>
+            </a:r>
+            <a:r>
+              <a:rPr sz="3000" b="0">
                 <a:solidFill>
                   <a:srgbClr val="1F2A44"/>
                 </a:solidFill>
                 <a:latin typeface="Nunito Sans"/>
               </a:rPr>
-              <a:t>«A mi primo le funcionó»</a:t>
-            </a:r>
-          </a:p>
-          <a:p>
-            <a:pPr>
-              <a:spcAft>
-                <a:spcPts val="1170"/>
-              </a:spcAft>
-            </a:pPr>
-            <a:r>
-              <a:rPr sz="2600" b="1">
-                <a:solidFill>
-                  <a:srgbClr val="E8793A"/>
-                </a:solidFill>
-                <a:latin typeface="Nunito Sans"/>
-              </a:rPr>
-              <a:t>• </a:t>
-            </a:r>
-            <a:r>
-              <a:rPr sz="2600" b="0">
-                <a:solidFill>
-                  <a:srgbClr val="1F2A44"/>
-                </a:solidFill>
-                <a:latin typeface="Nunito Sans"/>
-              </a:rPr>
-              <a:t>«Conozco a uno que…»</a:t>
-            </a:r>
-          </a:p>
-          <a:p>
-            <a:pPr>
-              <a:spcAft>
-                <a:spcPts val="1170"/>
-              </a:spcAft>
-            </a:pPr>
-            <a:r>
-              <a:rPr sz="2600" b="1">
-                <a:solidFill>
-                  <a:srgbClr val="E8793A"/>
-                </a:solidFill>
-                <a:latin typeface="Nunito Sans"/>
-              </a:rPr>
-              <a:t>• </a:t>
-            </a:r>
-            <a:r>
-              <a:rPr sz="2600" b="0">
-                <a:solidFill>
-                  <a:srgbClr val="1F2A44"/>
-                </a:solidFill>
-                <a:latin typeface="Nunito Sans"/>
-              </a:rPr>
-              <a:t>Un vídeo viral de un solo caso</a:t>
-            </a:r>
-          </a:p>
-        </p:txBody>
-      </p:sp>
-      <p:sp>
-        <p:nvSpPr>
-          <p:cNvPr id="7" name="Rectangle 6"/>
-          <p:cNvSpPr/>
-          <p:nvPr/>
-        </p:nvSpPr>
-        <p:spPr>
-          <a:xfrm>
-            <a:off x="6246000" y="1650000"/>
-            <a:ext cx="5306000" cy="4400000"/>
-          </a:xfrm>
-          <a:prstGeom prst="rect">
-            <a:avLst/>
-          </a:prstGeom>
-          <a:solidFill>
-            <a:srgbClr val="EAF0F7"/>
-          </a:solidFill>
-          <a:ln>
-            <a:noFill/>
-          </a:ln>
-        </p:spPr>
-        <p:style>
-          <a:lnRef idx="1">
-            <a:schemeClr val="accent1"/>
-          </a:lnRef>
-          <a:fillRef idx="3">
-            <a:schemeClr val="accent1"/>
-          </a:fillRef>
-          <a:effectRef idx="2">
-            <a:schemeClr val="accent1"/>
-          </a:effectRef>
-          <a:fontRef idx="minor">
-            <a:schemeClr val="lt1"/>
-          </a:fontRef>
-        </p:style>
-        <p:txBody>
-          <a:bodyPr rtlCol="0" anchor="ctr"/>
-          <a:lstStyle/>
-          <a:p>
-            <a:pPr algn="ctr"/>
-          </a:p>
-        </p:txBody>
-      </p:sp>
-      <p:sp>
-        <p:nvSpPr>
-          <p:cNvPr id="8" name="TextBox 7"/>
-          <p:cNvSpPr txBox="1"/>
-          <p:nvPr/>
-        </p:nvSpPr>
-        <p:spPr>
-          <a:xfrm>
-            <a:off x="6446000" y="1750000"/>
-            <a:ext cx="4906000" cy="600000"/>
-          </a:xfrm>
-          <a:prstGeom prst="rect">
-            <a:avLst/>
-          </a:prstGeom>
-          <a:noFill/>
-        </p:spPr>
-        <p:txBody>
-          <a:bodyPr wrap="square">
-            <a:spAutoFit/>
-          </a:bodyPr>
-          <a:lstStyle/>
-          <a:p>
-            <a:pPr>
-              <a:spcAft>
-                <a:spcPts val="1260"/>
-              </a:spcAft>
-            </a:pPr>
-            <a:r>
-              <a:rPr sz="2800" b="1">
-                <a:solidFill>
-                  <a:srgbClr val="2F6FB5"/>
-                </a:solidFill>
-                <a:latin typeface="Nunito Sans"/>
-              </a:rPr>
-              <a:t>Pruebas más fuertes</a:t>
-            </a:r>
-          </a:p>
-        </p:txBody>
-      </p:sp>
-      <p:sp>
-        <p:nvSpPr>
-          <p:cNvPr id="9" name="TextBox 8"/>
-          <p:cNvSpPr txBox="1"/>
-          <p:nvPr/>
-        </p:nvSpPr>
-        <p:spPr>
-          <a:xfrm>
-            <a:off x="6446000" y="2400000"/>
-            <a:ext cx="4906000" cy="3500000"/>
-          </a:xfrm>
-          <a:prstGeom prst="rect">
-            <a:avLst/>
-          </a:prstGeom>
-          <a:noFill/>
-        </p:spPr>
-        <p:txBody>
-          <a:bodyPr wrap="square">
-            <a:spAutoFit/>
-          </a:bodyPr>
-          <a:lstStyle/>
-          <a:p>
-            <a:pPr>
-              <a:spcAft>
-                <a:spcPts val="1170"/>
-              </a:spcAft>
-            </a:pPr>
-            <a:r>
-              <a:rPr sz="2600" b="1">
-                <a:solidFill>
-                  <a:srgbClr val="E8793A"/>
-                </a:solidFill>
-                <a:latin typeface="Nunito Sans"/>
-              </a:rPr>
-              <a:t>• </a:t>
-            </a:r>
-            <a:r>
-              <a:rPr sz="2600" b="0">
-                <a:solidFill>
-                  <a:srgbClr val="1F2A44"/>
-                </a:solidFill>
-                <a:latin typeface="Nunito Sans"/>
-              </a:rPr>
-              <a:t>Muchos casos contados bien</a:t>
-            </a:r>
-          </a:p>
-          <a:p>
-            <a:pPr>
-              <a:spcAft>
-                <a:spcPts val="1170"/>
-              </a:spcAft>
-            </a:pPr>
-            <a:r>
-              <a:rPr sz="2600" b="1">
-                <a:solidFill>
-                  <a:srgbClr val="E8793A"/>
-                </a:solidFill>
-                <a:latin typeface="Nunito Sans"/>
-              </a:rPr>
-              <a:t>• </a:t>
-            </a:r>
-            <a:r>
-              <a:rPr sz="2600" b="0">
-                <a:solidFill>
-                  <a:srgbClr val="1F2A44"/>
-                </a:solidFill>
-                <a:latin typeface="Nunito Sans"/>
-              </a:rPr>
-              <a:t>Comparar con un grupo que no lo hizo</a:t>
-            </a:r>
-          </a:p>
-          <a:p>
-            <a:pPr>
-              <a:spcAft>
-                <a:spcPts val="1170"/>
-              </a:spcAft>
-            </a:pPr>
-            <a:r>
-              <a:rPr sz="2600" b="1">
-                <a:solidFill>
-                  <a:srgbClr val="E8793A"/>
-                </a:solidFill>
-                <a:latin typeface="Nunito Sans"/>
-              </a:rPr>
-              <a:t>• </a:t>
-            </a:r>
-            <a:r>
-              <a:rPr sz="2600" b="0">
-                <a:solidFill>
-                  <a:srgbClr val="1F2A44"/>
-                </a:solidFill>
-                <a:latin typeface="Nunito Sans"/>
-              </a:rPr>
-              <a:t>Varios estudios que coinciden</a:t>
+              <a:t>Que sea difícil no quiere decir que todo valga: se comparan las razones.</a:t>
             </a:r>
           </a:p>
         </p:txBody>
@@ -5142,664 +4733,6 @@
 </file>
 
 <file path=ppt/slides/slide15.xml><?xml version="1.0" encoding="utf-8"?>
-<p:sld xmlns:a="http://schemas.openxmlformats.org/drawingml/2006/main" xmlns:p="http://schemas.openxmlformats.org/presentationml/2006/main" xmlns:r="http://schemas.openxmlformats.org/officeDocument/2006/relationships">
-  <p:cSld>
-    <p:bg>
-      <p:bgPr>
-        <a:solidFill>
-          <a:srgbClr val="F6C9A8"/>
-        </a:solidFill>
-        <a:effectLst/>
-      </p:bgPr>
-    </p:bg>
-    <p:spTree>
-      <p:nvGrpSpPr>
-        <p:cNvPr id="1" name=""/>
-        <p:cNvGrpSpPr/>
-        <p:nvPr/>
-      </p:nvGrpSpPr>
-      <p:grpSpPr/>
-      <p:sp>
-        <p:nvSpPr>
-          <p:cNvPr id="2" name="TextBox 1"/>
-          <p:cNvSpPr txBox="1"/>
-          <p:nvPr/>
-        </p:nvSpPr>
-        <p:spPr>
-          <a:xfrm>
-            <a:off x="640000" y="380000"/>
-            <a:ext cx="10912000" cy="420000"/>
-          </a:xfrm>
-          <a:prstGeom prst="rect">
-            <a:avLst/>
-          </a:prstGeom>
-          <a:noFill/>
-        </p:spPr>
-        <p:txBody>
-          <a:bodyPr wrap="square">
-            <a:spAutoFit/>
-          </a:bodyPr>
-          <a:lstStyle/>
-          <a:p>
-            <a:pPr>
-              <a:spcAft>
-                <a:spcPts val="630"/>
-              </a:spcAft>
-            </a:pPr>
-            <a:r>
-              <a:rPr sz="1400" b="1">
-                <a:solidFill>
-                  <a:srgbClr val="1F2A44"/>
-                </a:solidFill>
-                <a:latin typeface="Nunito Sans"/>
-              </a:rPr>
-              <a:t>CASO TRAMPA · BLOQUE 3 · ERROR TÍPICO Y CASO TRAMPA</a:t>
-            </a:r>
-          </a:p>
-        </p:txBody>
-      </p:sp>
-      <p:sp>
-        <p:nvSpPr>
-          <p:cNvPr id="3" name="TextBox 2"/>
-          <p:cNvSpPr txBox="1"/>
-          <p:nvPr/>
-        </p:nvSpPr>
-        <p:spPr>
-          <a:xfrm>
-            <a:off x="640000" y="760000"/>
-            <a:ext cx="10912000" cy="800000"/>
-          </a:xfrm>
-          <a:prstGeom prst="rect">
-            <a:avLst/>
-          </a:prstGeom>
-          <a:noFill/>
-        </p:spPr>
-        <p:txBody>
-          <a:bodyPr wrap="square">
-            <a:spAutoFit/>
-          </a:bodyPr>
-          <a:lstStyle/>
-          <a:p>
-            <a:pPr>
-              <a:spcAft>
-                <a:spcPts val="1710"/>
-              </a:spcAft>
-            </a:pPr>
-            <a:r>
-              <a:rPr sz="3800" b="1">
-                <a:solidFill>
-                  <a:srgbClr val="1F2A44"/>
-                </a:solidFill>
-                <a:latin typeface="Fredoka"/>
-              </a:rPr>
-              <a:t>⚠ El casco que «nunca» falla</a:t>
-            </a:r>
-          </a:p>
-        </p:txBody>
-      </p:sp>
-      <p:sp>
-        <p:nvSpPr>
-          <p:cNvPr id="4" name="Rectangle 3"/>
-          <p:cNvSpPr/>
-          <p:nvPr/>
-        </p:nvSpPr>
-        <p:spPr>
-          <a:xfrm>
-            <a:off x="640000" y="1600000"/>
-            <a:ext cx="10912000" cy="1100000"/>
-          </a:xfrm>
-          <a:prstGeom prst="rect">
-            <a:avLst/>
-          </a:prstGeom>
-          <a:solidFill>
-            <a:srgbClr val="FBF7EF"/>
-          </a:solidFill>
-          <a:ln>
-            <a:noFill/>
-          </a:ln>
-        </p:spPr>
-        <p:style>
-          <a:lnRef idx="1">
-            <a:schemeClr val="accent1"/>
-          </a:lnRef>
-          <a:fillRef idx="3">
-            <a:schemeClr val="accent1"/>
-          </a:fillRef>
-          <a:effectRef idx="2">
-            <a:schemeClr val="accent1"/>
-          </a:effectRef>
-          <a:fontRef idx="minor">
-            <a:schemeClr val="lt1"/>
-          </a:fontRef>
-        </p:style>
-        <p:txBody>
-          <a:bodyPr rtlCol="0" anchor="ctr"/>
-          <a:lstStyle/>
-          <a:p>
-            <a:pPr algn="ctr"/>
-          </a:p>
-        </p:txBody>
-      </p:sp>
-      <p:sp>
-        <p:nvSpPr>
-          <p:cNvPr id="5" name="TextBox 4"/>
-          <p:cNvSpPr txBox="1"/>
-          <p:nvPr/>
-        </p:nvSpPr>
-        <p:spPr>
-          <a:xfrm>
-            <a:off x="840000" y="1650000"/>
-            <a:ext cx="10512000" cy="1000000"/>
-          </a:xfrm>
-          <a:prstGeom prst="rect">
-            <a:avLst/>
-          </a:prstGeom>
-          <a:noFill/>
-        </p:spPr>
-        <p:txBody>
-          <a:bodyPr wrap="square" anchor="ctr">
-            <a:spAutoFit/>
-          </a:bodyPr>
-          <a:lstStyle/>
-          <a:p>
-            <a:pPr>
-              <a:spcAft>
-                <a:spcPts val="1170"/>
-              </a:spcAft>
-            </a:pPr>
-            <a:r>
-              <a:rPr sz="2600" b="1">
-                <a:solidFill>
-                  <a:srgbClr val="1F2A44"/>
-                </a:solidFill>
-                <a:latin typeface="Nunito Sans"/>
-              </a:rPr>
-              <a:t>Anuncio (inventado): «Con nuestro casco, nunca te harás una herida en la cabeza». Un chico se cayó con ese casco puesto y se hizo una herida.</a:t>
-            </a:r>
-          </a:p>
-        </p:txBody>
-      </p:sp>
-      <p:sp>
-        <p:nvSpPr>
-          <p:cNvPr id="6" name="TextBox 5"/>
-          <p:cNvSpPr txBox="1"/>
-          <p:nvPr/>
-        </p:nvSpPr>
-        <p:spPr>
-          <a:xfrm>
-            <a:off x="640000" y="2900000"/>
-            <a:ext cx="10912000" cy="3500000"/>
-          </a:xfrm>
-          <a:prstGeom prst="rect">
-            <a:avLst/>
-          </a:prstGeom>
-          <a:noFill/>
-        </p:spPr>
-        <p:txBody>
-          <a:bodyPr wrap="square">
-            <a:spAutoFit/>
-          </a:bodyPr>
-          <a:lstStyle/>
-          <a:p>
-            <a:pPr>
-              <a:spcAft>
-                <a:spcPts val="1080"/>
-              </a:spcAft>
-            </a:pPr>
-            <a:r>
-              <a:rPr sz="2400" b="1">
-                <a:solidFill>
-                  <a:srgbClr val="E8793A"/>
-                </a:solidFill>
-                <a:latin typeface="Nunito Sans"/>
-              </a:rPr>
-              <a:t>1. </a:t>
-            </a:r>
-            <a:r>
-              <a:rPr sz="2400" b="0">
-                <a:solidFill>
-                  <a:srgbClr val="1F2A44"/>
-                </a:solidFill>
-                <a:latin typeface="Nunito Sans"/>
-              </a:rPr>
-              <a:t>Es solo una anécdota. ¿Entonces no sirve para nada?</a:t>
-            </a:r>
-          </a:p>
-          <a:p>
-            <a:pPr>
-              <a:spcAft>
-                <a:spcPts val="1080"/>
-              </a:spcAft>
-            </a:pPr>
-            <a:r>
-              <a:rPr sz="2400" b="1">
-                <a:solidFill>
-                  <a:srgbClr val="E8793A"/>
-                </a:solidFill>
-                <a:latin typeface="Nunito Sans"/>
-              </a:rPr>
-              <a:t>2. </a:t>
-            </a:r>
-            <a:r>
-              <a:rPr sz="2400" b="0">
-                <a:solidFill>
-                  <a:srgbClr val="1F2A44"/>
-                </a:solidFill>
-                <a:latin typeface="Nunito Sans"/>
-              </a:rPr>
-              <a:t>Para saber cómo es la mayoría, un caso no basta.</a:t>
-            </a:r>
-          </a:p>
-          <a:p>
-            <a:pPr>
-              <a:spcAft>
-                <a:spcPts val="1080"/>
-              </a:spcAft>
-            </a:pPr>
-            <a:r>
-              <a:rPr sz="2400" b="1">
-                <a:solidFill>
-                  <a:srgbClr val="E8793A"/>
-                </a:solidFill>
-                <a:latin typeface="Nunito Sans"/>
-              </a:rPr>
-              <a:t>3. </a:t>
-            </a:r>
-            <a:r>
-              <a:rPr sz="2400" b="0">
-                <a:solidFill>
-                  <a:srgbClr val="1F2A44"/>
-                </a:solidFill>
-                <a:latin typeface="Nunito Sans"/>
-              </a:rPr>
-              <a:t>Pero el anuncio dice «nunca». Para tumbar un «nunca», basta un </a:t>
-            </a:r>
-            <a:r>
-              <a:rPr sz="2400" b="1">
-                <a:solidFill>
-                  <a:srgbClr val="1F2A44"/>
-                </a:solidFill>
-                <a:latin typeface="Nunito Sans"/>
-              </a:rPr>
-              <a:t>contraejemplo</a:t>
-            </a:r>
-            <a:r>
-              <a:rPr sz="2400" b="0">
-                <a:solidFill>
-                  <a:srgbClr val="1F2A44"/>
-                </a:solidFill>
-                <a:latin typeface="Nunito Sans"/>
-              </a:rPr>
-              <a:t>: un caso que dice lo contrario.</a:t>
-            </a:r>
-          </a:p>
-          <a:p>
-            <a:pPr>
-              <a:spcAft>
-                <a:spcPts val="1080"/>
-              </a:spcAft>
-            </a:pPr>
-            <a:r>
-              <a:rPr sz="2400" b="1">
-                <a:solidFill>
-                  <a:srgbClr val="E8793A"/>
-                </a:solidFill>
-                <a:latin typeface="Nunito Sans"/>
-              </a:rPr>
-              <a:t>4. </a:t>
-            </a:r>
-            <a:r>
-              <a:rPr sz="2400" b="0">
-                <a:solidFill>
-                  <a:srgbClr val="1F2A44"/>
-                </a:solidFill>
-                <a:latin typeface="Nunito Sans"/>
-              </a:rPr>
-              <a:t>Si lo del chico es verdad, el anuncio es falso, aunque el casco proteja mucho.</a:t>
-            </a:r>
-          </a:p>
-          <a:p>
-            <a:pPr>
-              <a:spcAft>
-                <a:spcPts val="1080"/>
-              </a:spcAft>
-            </a:pPr>
-            <a:r>
-              <a:rPr sz="2400" b="1">
-                <a:solidFill>
-                  <a:srgbClr val="E8793A"/>
-                </a:solidFill>
-                <a:latin typeface="Nunito Sans"/>
-              </a:rPr>
-              <a:t>5. </a:t>
-            </a:r>
-            <a:r>
-              <a:rPr sz="2400" b="0">
-                <a:solidFill>
-                  <a:srgbClr val="1F2A44"/>
-                </a:solidFill>
-                <a:latin typeface="Nunito Sans"/>
-              </a:rPr>
-              <a:t>Conclusión: una anécdota no prueba una regla general, pero sí puede tumbar un «nunca» o un «siempre».</a:t>
-            </a:r>
-          </a:p>
-        </p:txBody>
-      </p:sp>
-    </p:spTree>
-  </p:cSld>
-  <p:clrMapOvr>
-    <a:masterClrMapping/>
-  </p:clrMapOvr>
-</p:sld>
-</file>
-
-<file path=ppt/slides/slide16.xml><?xml version="1.0" encoding="utf-8"?>
-<p:sld xmlns:a="http://schemas.openxmlformats.org/drawingml/2006/main" xmlns:p="http://schemas.openxmlformats.org/presentationml/2006/main" xmlns:r="http://schemas.openxmlformats.org/officeDocument/2006/relationships">
-  <p:cSld>
-    <p:bg>
-      <p:bgPr>
-        <a:solidFill>
-          <a:srgbClr val="FBF7EF"/>
-        </a:solidFill>
-        <a:effectLst/>
-      </p:bgPr>
-    </p:bg>
-    <p:spTree>
-      <p:nvGrpSpPr>
-        <p:cNvPr id="1" name=""/>
-        <p:cNvGrpSpPr/>
-        <p:nvPr/>
-      </p:nvGrpSpPr>
-      <p:grpSpPr/>
-      <p:sp>
-        <p:nvSpPr>
-          <p:cNvPr id="2" name="TextBox 1"/>
-          <p:cNvSpPr txBox="1"/>
-          <p:nvPr/>
-        </p:nvSpPr>
-        <p:spPr>
-          <a:xfrm>
-            <a:off x="640000" y="380000"/>
-            <a:ext cx="10912000" cy="420000"/>
-          </a:xfrm>
-          <a:prstGeom prst="rect">
-            <a:avLst/>
-          </a:prstGeom>
-          <a:noFill/>
-        </p:spPr>
-        <p:txBody>
-          <a:bodyPr wrap="square">
-            <a:spAutoFit/>
-          </a:bodyPr>
-          <a:lstStyle/>
-          <a:p>
-            <a:pPr>
-              <a:spcAft>
-                <a:spcPts val="630"/>
-              </a:spcAft>
-            </a:pPr>
-            <a:r>
-              <a:rPr sz="1400" b="1">
-                <a:solidFill>
-                  <a:srgbClr val="E8793A"/>
-                </a:solidFill>
-                <a:latin typeface="Nunito Sans"/>
-              </a:rPr>
-              <a:t>LO DE HOY EN TRES LÍNEAS</a:t>
-            </a:r>
-          </a:p>
-        </p:txBody>
-      </p:sp>
-      <p:sp>
-        <p:nvSpPr>
-          <p:cNvPr id="3" name="TextBox 2"/>
-          <p:cNvSpPr txBox="1"/>
-          <p:nvPr/>
-        </p:nvSpPr>
-        <p:spPr>
-          <a:xfrm>
-            <a:off x="640000" y="760000"/>
-            <a:ext cx="10912000" cy="800000"/>
-          </a:xfrm>
-          <a:prstGeom prst="rect">
-            <a:avLst/>
-          </a:prstGeom>
-          <a:noFill/>
-        </p:spPr>
-        <p:txBody>
-          <a:bodyPr wrap="square">
-            <a:spAutoFit/>
-          </a:bodyPr>
-          <a:lstStyle/>
-          <a:p>
-            <a:pPr>
-              <a:spcAft>
-                <a:spcPts val="1710"/>
-              </a:spcAft>
-            </a:pPr>
-            <a:r>
-              <a:rPr sz="3800" b="1">
-                <a:solidFill>
-                  <a:srgbClr val="1F2A44"/>
-                </a:solidFill>
-                <a:latin typeface="Fredoka"/>
-              </a:rPr>
-              <a:t>Escríbelo tú primero, sin mirar</a:t>
-            </a:r>
-          </a:p>
-        </p:txBody>
-      </p:sp>
-      <p:sp>
-        <p:nvSpPr>
-          <p:cNvPr id="4" name="TextBox 3"/>
-          <p:cNvSpPr txBox="1"/>
-          <p:nvPr/>
-        </p:nvSpPr>
-        <p:spPr>
-          <a:xfrm>
-            <a:off x="640000" y="1800000"/>
-            <a:ext cx="10912000" cy="1500000"/>
-          </a:xfrm>
-          <a:prstGeom prst="rect">
-            <a:avLst/>
-          </a:prstGeom>
-          <a:noFill/>
-        </p:spPr>
-        <p:txBody>
-          <a:bodyPr wrap="square">
-            <a:spAutoFit/>
-          </a:bodyPr>
-          <a:lstStyle/>
-          <a:p>
-            <a:pPr>
-              <a:spcAft>
-                <a:spcPts val="1170"/>
-              </a:spcAft>
-            </a:pPr>
-            <a:r>
-              <a:rPr sz="2600" b="0">
-                <a:solidFill>
-                  <a:srgbClr val="4A5568"/>
-                </a:solidFill>
-                <a:latin typeface="Nunito Sans"/>
-              </a:rPr>
-              <a:t>Dos minutos. Después lo comparamos.</a:t>
-            </a:r>
-          </a:p>
-        </p:txBody>
-      </p:sp>
-    </p:spTree>
-  </p:cSld>
-  <p:clrMapOvr>
-    <a:masterClrMapping/>
-  </p:clrMapOvr>
-</p:sld>
-</file>
-
-<file path=ppt/slides/slide17.xml><?xml version="1.0" encoding="utf-8"?>
-<p:sld xmlns:a="http://schemas.openxmlformats.org/drawingml/2006/main" xmlns:p="http://schemas.openxmlformats.org/presentationml/2006/main" xmlns:r="http://schemas.openxmlformats.org/officeDocument/2006/relationships">
-  <p:cSld>
-    <p:bg>
-      <p:bgPr>
-        <a:solidFill>
-          <a:srgbClr val="FBF7EF"/>
-        </a:solidFill>
-        <a:effectLst/>
-      </p:bgPr>
-    </p:bg>
-    <p:spTree>
-      <p:nvGrpSpPr>
-        <p:cNvPr id="1" name=""/>
-        <p:cNvGrpSpPr/>
-        <p:nvPr/>
-      </p:nvGrpSpPr>
-      <p:grpSpPr/>
-      <p:sp>
-        <p:nvSpPr>
-          <p:cNvPr id="2" name="TextBox 1"/>
-          <p:cNvSpPr txBox="1"/>
-          <p:nvPr/>
-        </p:nvSpPr>
-        <p:spPr>
-          <a:xfrm>
-            <a:off x="640000" y="380000"/>
-            <a:ext cx="10912000" cy="420000"/>
-          </a:xfrm>
-          <a:prstGeom prst="rect">
-            <a:avLst/>
-          </a:prstGeom>
-          <a:noFill/>
-        </p:spPr>
-        <p:txBody>
-          <a:bodyPr wrap="square">
-            <a:spAutoFit/>
-          </a:bodyPr>
-          <a:lstStyle/>
-          <a:p>
-            <a:pPr>
-              <a:spcAft>
-                <a:spcPts val="630"/>
-              </a:spcAft>
-            </a:pPr>
-            <a:r>
-              <a:rPr sz="1400" b="1">
-                <a:solidFill>
-                  <a:srgbClr val="E8793A"/>
-                </a:solidFill>
-                <a:latin typeface="Nunito Sans"/>
-              </a:rPr>
-              <a:t>LO DE HOY EN TRES LÍNEAS</a:t>
-            </a:r>
-          </a:p>
-        </p:txBody>
-      </p:sp>
-      <p:sp>
-        <p:nvSpPr>
-          <p:cNvPr id="3" name="TextBox 2"/>
-          <p:cNvSpPr txBox="1"/>
-          <p:nvPr/>
-        </p:nvSpPr>
-        <p:spPr>
-          <a:xfrm>
-            <a:off x="640000" y="1300000"/>
-            <a:ext cx="10912000" cy="4800000"/>
-          </a:xfrm>
-          <a:prstGeom prst="rect">
-            <a:avLst/>
-          </a:prstGeom>
-          <a:noFill/>
-        </p:spPr>
-        <p:txBody>
-          <a:bodyPr wrap="square">
-            <a:spAutoFit/>
-          </a:bodyPr>
-          <a:lstStyle/>
-          <a:p>
-            <a:pPr>
-              <a:spcAft>
-                <a:spcPts val="1350"/>
-              </a:spcAft>
-            </a:pPr>
-            <a:r>
-              <a:rPr sz="3000" b="1">
-                <a:solidFill>
-                  <a:srgbClr val="E8793A"/>
-                </a:solidFill>
-                <a:latin typeface="Nunito Sans"/>
-              </a:rPr>
-              <a:t>1. </a:t>
-            </a:r>
-            <a:r>
-              <a:rPr sz="3000" b="0">
-                <a:solidFill>
-                  <a:srgbClr val="1F2A44"/>
-                </a:solidFill>
-                <a:latin typeface="Nunito Sans"/>
-              </a:rPr>
-              <a:t>La media suma y divide; la mediana es el dato del medio.</a:t>
-            </a:r>
-          </a:p>
-          <a:p>
-            <a:pPr>
-              <a:spcAft>
-                <a:spcPts val="1350"/>
-              </a:spcAft>
-            </a:pPr>
-            <a:r>
-              <a:rPr sz="3000" b="1">
-                <a:solidFill>
-                  <a:srgbClr val="E8793A"/>
-                </a:solidFill>
-                <a:latin typeface="Nunito Sans"/>
-              </a:rPr>
-              <a:t>2. </a:t>
-            </a:r>
-            <a:r>
-              <a:rPr sz="3000" b="0">
-                <a:solidFill>
-                  <a:srgbClr val="1F2A44"/>
-                </a:solidFill>
-                <a:latin typeface="Nunito Sans"/>
-              </a:rPr>
-              <a:t>La media resume, pero esconde: un dato muy grande o muy pequeño la deforma.</a:t>
-            </a:r>
-          </a:p>
-          <a:p>
-            <a:pPr>
-              <a:spcAft>
-                <a:spcPts val="1350"/>
-              </a:spcAft>
-            </a:pPr>
-            <a:r>
-              <a:rPr sz="3000" b="1">
-                <a:solidFill>
-                  <a:srgbClr val="E8793A"/>
-                </a:solidFill>
-                <a:latin typeface="Nunito Sans"/>
-              </a:rPr>
-              <a:t>3. </a:t>
-            </a:r>
-            <a:r>
-              <a:rPr sz="3000" b="0">
-                <a:solidFill>
-                  <a:srgbClr val="1F2A44"/>
-                </a:solidFill>
-                <a:latin typeface="Nunito Sans"/>
-              </a:rPr>
-              <a:t>Una anécdota no prueba cómo es la mayoría, pero sí puede tumbar un «nunca».</a:t>
-            </a:r>
-          </a:p>
-        </p:txBody>
-      </p:sp>
-    </p:spTree>
-  </p:cSld>
-  <p:clrMapOvr>
-    <a:masterClrMapping/>
-  </p:clrMapOvr>
-</p:sld>
-</file>
-
-<file path=ppt/slides/slide18.xml><?xml version="1.0" encoding="utf-8"?>
 <p:sld xmlns:a="http://schemas.openxmlformats.org/drawingml/2006/main" xmlns:p="http://schemas.openxmlformats.org/presentationml/2006/main" xmlns:r="http://schemas.openxmlformats.org/officeDocument/2006/relationships">
   <p:cSld>
     <p:bg>
@@ -5890,7 +4823,7 @@
                 </a:solidFill>
                 <a:latin typeface="Fredoka"/>
               </a:rPr>
-              <a:t>Por qué la media puede engañar</a:t>
+              <a:t>Qué es un dilema moral, con ejemplos cotidianos</a:t>
             </a:r>
           </a:p>
         </p:txBody>
@@ -5929,7 +4862,7 @@
                 </a:solidFill>
                 <a:latin typeface="Nunito Sans"/>
               </a:rPr>
-              <a:t>Ver otro ejemplo de media deformada por un dato muy grande.</a:t>
+              <a:t>Ver más ejemplos de valores que chocan, contados de otra forma.</a:t>
             </a:r>
           </a:p>
         </p:txBody>
@@ -5942,7 +4875,7 @@
 </p:sld>
 </file>
 
-<file path=ppt/slides/slide19.xml><?xml version="1.0" encoding="utf-8"?>
+<file path=ppt/slides/slide16.xml><?xml version="1.0" encoding="utf-8"?>
 <p:sld xmlns:a="http://schemas.openxmlformats.org/drawingml/2006/main" xmlns:p="http://schemas.openxmlformats.org/presentationml/2006/main" xmlns:r="http://schemas.openxmlformats.org/officeDocument/2006/relationships">
   <p:cSld>
     <p:bg>
@@ -6587,7 +5520,7 @@
                 </a:solidFill>
                 <a:latin typeface="Nunito Sans"/>
               </a:rPr>
-              <a:t>Una correlación puede probar una causa cuando se ______ las otras explicaciones.  (sesión 40)</a:t>
+              <a:t>Ante el ciberacoso: guardar ______, bloquear, denunciar y contarlo a un adulto.  (sesión 40)</a:t>
             </a:r>
           </a:p>
           <a:p>
@@ -6612,7 +5545,7 @@
                 </a:solidFill>
                 <a:latin typeface="Nunito Sans"/>
               </a:rPr>
-              <a:t>Causa significa que una cosa ______ la otra.  (sesión 40)</a:t>
+              <a:t>El ciberacoso es hacer daño a alguien a propósito y de forma ______ usando la tecnología.  (sesión 40)</a:t>
             </a:r>
           </a:p>
           <a:p>
@@ -6637,7 +5570,7 @@
                 </a:solidFill>
                 <a:latin typeface="Nunito Sans"/>
               </a:rPr>
-              <a:t>Hoy un experimento como el de las descargas no estaría ______.  (sesión 29)</a:t>
+              <a:t>Pregunta que desmonta el razonamiento circular: ¿la razón dice algo ______ de la conclusión?  (sesión 29)</a:t>
             </a:r>
           </a:p>
         </p:txBody>
@@ -6789,7 +5722,7 @@
                 </a:solidFill>
                 <a:latin typeface="Nunito Sans"/>
               </a:rPr>
-              <a:t>Una correlación puede probar una causa cuando se </a:t>
+              <a:t>Ante el ciberacoso: guardar </a:t>
             </a:r>
             <a:r>
               <a:rPr sz="2600" b="1">
@@ -6798,7 +5731,7 @@
                 </a:solidFill>
                 <a:latin typeface="Nunito Sans"/>
               </a:rPr>
-              <a:t>descartan</a:t>
+              <a:t>pruebas</a:t>
             </a:r>
             <a:r>
               <a:rPr sz="2600" b="0">
@@ -6807,7 +5740,7 @@
                 </a:solidFill>
                 <a:latin typeface="Nunito Sans"/>
               </a:rPr>
-              <a:t> las otras explicaciones.  (sesión 40)</a:t>
+              <a:t>, bloquear, denunciar y contarlo a un adulto.  (sesión 40)</a:t>
             </a:r>
           </a:p>
           <a:p>
@@ -6832,7 +5765,7 @@
                 </a:solidFill>
                 <a:latin typeface="Nunito Sans"/>
               </a:rPr>
-              <a:t>Causa significa que una cosa </a:t>
+              <a:t>El ciberacoso es hacer daño a alguien a propósito y de forma </a:t>
             </a:r>
             <a:r>
               <a:rPr sz="2600" b="1">
@@ -6841,7 +5774,7 @@
                 </a:solidFill>
                 <a:latin typeface="Nunito Sans"/>
               </a:rPr>
-              <a:t>produce</a:t>
+              <a:t>repetida</a:t>
             </a:r>
             <a:r>
               <a:rPr sz="2600" b="0">
@@ -6850,7 +5783,7 @@
                 </a:solidFill>
                 <a:latin typeface="Nunito Sans"/>
               </a:rPr>
-              <a:t> la otra.  (sesión 40)</a:t>
+              <a:t> usando la tecnología.  (sesión 40)</a:t>
             </a:r>
           </a:p>
           <a:p>
@@ -6875,7 +5808,7 @@
                 </a:solidFill>
                 <a:latin typeface="Nunito Sans"/>
               </a:rPr>
-              <a:t>Hoy un experimento como el de las descargas no estaría </a:t>
+              <a:t>Pregunta que desmonta el razonamiento circular: ¿la razón dice algo </a:t>
             </a:r>
             <a:r>
               <a:rPr sz="2600" b="1">
@@ -6884,7 +5817,7 @@
                 </a:solidFill>
                 <a:latin typeface="Nunito Sans"/>
               </a:rPr>
-              <a:t>permitido</a:t>
+              <a:t>distinto</a:t>
             </a:r>
             <a:r>
               <a:rPr sz="2600" b="0">
@@ -6893,7 +5826,7 @@
                 </a:solidFill>
                 <a:latin typeface="Nunito Sans"/>
               </a:rPr>
-              <a:t>.  (sesión 29)</a:t>
+              <a:t> de la conclusión?  (sesión 29)</a:t>
             </a:r>
           </a:p>
         </p:txBody>
@@ -7040,7 +5973,7 @@
                 </a:solidFill>
                 <a:latin typeface="Nunito Sans"/>
               </a:rPr>
-              <a:t>«En esta empresa el sueldo medio es de 5.000 € al mes.» Trabajan un jefe y cuatro empleados. (Ejemplo inventado.)</a:t>
+              <a:t>Una chica ve que su mejor amiga copia en un examen. Al día siguiente, la profesora le pregunta si vio algo.</a:t>
             </a:r>
           </a:p>
         </p:txBody>
@@ -7079,7 +6012,7 @@
                 </a:solidFill>
                 <a:latin typeface="Nunito Sans"/>
               </a:rPr>
-              <a:t>¿Cuánto crees que cobran los empleados?</a:t>
+              <a:t>¿Qué debería hacer? ¿Por qué cuesta tanto decidir?</a:t>
             </a:r>
           </a:p>
         </p:txBody>
@@ -7183,7 +6116,7 @@
                 </a:solidFill>
                 <a:latin typeface="Fredoka"/>
               </a:rPr>
-              <a:t>La media y la anécdota</a:t>
+              <a:t>Qué es un dilema</a:t>
             </a:r>
           </a:p>
         </p:txBody>
@@ -7248,7 +6181,7 @@
                 </a:solidFill>
                 <a:latin typeface="Nunito Sans"/>
               </a:rPr>
-              <a:t>BLOQUE 1 · LA MEDIA Y LA ANÉCDOTA</a:t>
+              <a:t>BLOQUE 1 · QUÉ ES UN DILEMA</a:t>
             </a:r>
           </a:p>
         </p:txBody>
@@ -7287,7 +6220,7 @@
                 </a:solidFill>
                 <a:latin typeface="Fredoka"/>
               </a:rPr>
-              <a:t>Media</a:t>
+              <a:t>Valor</a:t>
             </a:r>
           </a:p>
         </p:txBody>
@@ -7369,7 +6302,25 @@
                 </a:solidFill>
                 <a:latin typeface="Nunito Sans"/>
               </a:rPr>
-              <a:t>La media se calcula sumando todos los datos y dividiendo entre cuántos datos hay.</a:t>
+              <a:t>Un </a:t>
+            </a:r>
+            <a:r>
+              <a:rPr sz="2800" b="1">
+                <a:solidFill>
+                  <a:srgbClr val="1F2A44"/>
+                </a:solidFill>
+                <a:latin typeface="Nunito Sans"/>
+              </a:rPr>
+              <a:t>valor</a:t>
+            </a:r>
+            <a:r>
+              <a:rPr sz="2800" b="1">
+                <a:solidFill>
+                  <a:srgbClr val="1F2A44"/>
+                </a:solidFill>
+                <a:latin typeface="Nunito Sans"/>
+              </a:rPr>
+              <a:t> es algo que consideramos importante y que guía lo que hacemos.</a:t>
             </a:r>
           </a:p>
         </p:txBody>
@@ -7417,7 +6368,7 @@
                 </a:solidFill>
                 <a:latin typeface="Nunito Sans"/>
               </a:rPr>
-              <a:t>Notas 4, 6 y 8 → (4+6+8) : 3 = 6</a:t>
+              <a:t>Ejemplos: sinceridad, lealtad, justicia, cuidar a otros</a:t>
             </a:r>
           </a:p>
           <a:p>
@@ -7442,7 +6393,7 @@
                 </a:solidFill>
                 <a:latin typeface="Nunito Sans"/>
               </a:rPr>
-              <a:t>Resume muchos datos en un solo número</a:t>
+              <a:t>No es un gusto: no habla solo de mí</a:t>
             </a:r>
           </a:p>
           <a:p>
@@ -7467,68 +6418,7 @@
                 </a:solidFill>
                 <a:latin typeface="Nunito Sans"/>
               </a:rPr>
-              <a:t>Pero </a:t>
-            </a:r>
-            <a:r>
-              <a:rPr sz="2800" b="1">
-                <a:solidFill>
-                  <a:srgbClr val="1F2A44"/>
-                </a:solidFill>
-                <a:latin typeface="Nunito Sans"/>
-              </a:rPr>
-              <a:t>esconde</a:t>
-            </a:r>
-            <a:r>
-              <a:rPr sz="2800" b="0">
-                <a:solidFill>
-                  <a:srgbClr val="1F2A44"/>
-                </a:solidFill>
-                <a:latin typeface="Nunito Sans"/>
-              </a:rPr>
-              <a:t> cómo son los datos por dentro</a:t>
-            </a:r>
-          </a:p>
-          <a:p>
-            <a:pPr>
-              <a:spcAft>
-                <a:spcPts val="1260"/>
-              </a:spcAft>
-            </a:pPr>
-            <a:r>
-              <a:rPr sz="2800" b="1">
-                <a:solidFill>
-                  <a:srgbClr val="E8793A"/>
-                </a:solidFill>
-                <a:latin typeface="Nunito Sans"/>
-              </a:rPr>
-              <a:t>• </a:t>
-            </a:r>
-            <a:r>
-              <a:rPr sz="2800" b="0">
-                <a:solidFill>
-                  <a:srgbClr val="1F2A44"/>
-                </a:solidFill>
-                <a:latin typeface="Nunito Sans"/>
-              </a:rPr>
-              <a:t>La </a:t>
-            </a:r>
-            <a:r>
-              <a:rPr sz="2800" b="1">
-                <a:solidFill>
-                  <a:srgbClr val="1F2A44"/>
-                </a:solidFill>
-                <a:latin typeface="Nunito Sans"/>
-              </a:rPr>
-              <a:t>mediana</a:t>
-            </a:r>
-            <a:r>
-              <a:rPr sz="2800" b="0">
-                <a:solidFill>
-                  <a:srgbClr val="1F2A44"/>
-                </a:solidFill>
-                <a:latin typeface="Nunito Sans"/>
-              </a:rPr>
-              <a:t> es el dato del medio, ordenados de menor a mayor</a:t>
+              <a:t>Casi todos compartimos muchos valores</a:t>
             </a:r>
           </a:p>
         </p:txBody>
@@ -7593,7 +6483,7 @@
                 </a:solidFill>
                 <a:latin typeface="Nunito Sans"/>
               </a:rPr>
-              <a:t>BLOQUE 1 · LA MEDIA Y LA ANÉCDOTA</a:t>
+              <a:t>BLOQUE 1 · QUÉ ES UN DILEMA</a:t>
             </a:r>
           </a:p>
         </p:txBody>
@@ -7632,310 +6522,245 @@
                 </a:solidFill>
                 <a:latin typeface="Fredoka"/>
               </a:rPr>
-              <a:t>Dos institutos con media 5 (ejemplo inventado)</a:t>
-            </a:r>
-          </a:p>
-        </p:txBody>
-      </p:sp>
-      <p:graphicFrame>
-        <p:nvGraphicFramePr>
-          <p:cNvPr id="4" name="Table 3"/>
-          <p:cNvGraphicFramePr>
-            <a:graphicFrameLocks noGrp="1"/>
-          </p:cNvGraphicFramePr>
+              <a:t>Dilema ético</a:t>
+            </a:r>
+          </a:p>
+        </p:txBody>
+      </p:sp>
+      <p:sp>
+        <p:nvSpPr>
+          <p:cNvPr id="4" name="Rectangle 3"/>
+          <p:cNvSpPr/>
           <p:nvPr/>
-        </p:nvGraphicFramePr>
-        <p:xfrm>
-          <a:off x="640000" y="1700000"/>
-          <a:ext cx="10912000" cy="2400000"/>
-        </p:xfrm>
-        <a:graphic>
-          <a:graphicData uri="http://schemas.openxmlformats.org/drawingml/2006/table">
-            <a:tbl>
-              <a:tblPr firstRow="1" bandRow="1">
-                <a:tableStyleId>{5C22544A-7EE6-4342-B048-85BDC9FD1C3A}</a:tableStyleId>
-              </a:tblPr>
-              <a:tblGrid>
-                <a:gridCol w="3637333"/>
-                <a:gridCol w="3637333"/>
-                <a:gridCol w="3637334"/>
-              </a:tblGrid>
-              <a:tr h="600000">
-                <a:tc>
-                  <a:txBody>
-                    <a:bodyPr/>
-                    <a:lstStyle/>
-                    <a:p>
-                      <a:r>
-                        <a:rPr sz="2000" b="1">
-                          <a:solidFill>
-                            <a:srgbClr val="FBF7EF"/>
-                          </a:solidFill>
-                          <a:latin typeface="Fredoka"/>
-                        </a:rPr>
-                        <a:t>Instituto</a:t>
-                      </a:r>
-                    </a:p>
-                  </a:txBody>
-                  <a:tcPr>
-                    <a:solidFill>
-                      <a:srgbClr val="1F2A44"/>
-                    </a:solidFill>
-                  </a:tcPr>
-                </a:tc>
-                <a:tc>
-                  <a:txBody>
-                    <a:bodyPr/>
-                    <a:lstStyle/>
-                    <a:p>
-                      <a:r>
-                        <a:rPr sz="2000" b="1">
-                          <a:solidFill>
-                            <a:srgbClr val="FBF7EF"/>
-                          </a:solidFill>
-                          <a:latin typeface="Fredoka"/>
-                        </a:rPr>
-                        <a:t>Notas</a:t>
-                      </a:r>
-                    </a:p>
-                  </a:txBody>
-                  <a:tcPr>
-                    <a:solidFill>
-                      <a:srgbClr val="1F2A44"/>
-                    </a:solidFill>
-                  </a:tcPr>
-                </a:tc>
-                <a:tc>
-                  <a:txBody>
-                    <a:bodyPr/>
-                    <a:lstStyle/>
-                    <a:p>
-                      <a:r>
-                        <a:rPr sz="2000" b="1">
-                          <a:solidFill>
-                            <a:srgbClr val="FBF7EF"/>
-                          </a:solidFill>
-                          <a:latin typeface="Fredoka"/>
-                        </a:rPr>
-                        <a:t>Media</a:t>
-                      </a:r>
-                    </a:p>
-                  </a:txBody>
-                  <a:tcPr>
-                    <a:solidFill>
-                      <a:srgbClr val="1F2A44"/>
-                    </a:solidFill>
-                  </a:tcPr>
-                </a:tc>
-              </a:tr>
-              <a:tr h="600000">
-                <a:tc>
-                  <a:txBody>
-                    <a:bodyPr/>
-                    <a:lstStyle/>
-                    <a:p>
-                      <a:r>
-                        <a:rPr sz="2000" b="0">
-                          <a:solidFill>
-                            <a:srgbClr val="1F2A44"/>
-                          </a:solidFill>
-                          <a:latin typeface="Nunito Sans"/>
-                        </a:rPr>
-                        <a:t>Instituto A</a:t>
-                      </a:r>
-                    </a:p>
-                  </a:txBody>
-                  <a:tcPr>
-                    <a:solidFill>
-                      <a:srgbClr val="FFFFFF"/>
-                    </a:solidFill>
-                  </a:tcPr>
-                </a:tc>
-                <a:tc>
-                  <a:txBody>
-                    <a:bodyPr/>
-                    <a:lstStyle/>
-                    <a:p>
-                      <a:r>
-                        <a:rPr sz="2000" b="0">
-                          <a:solidFill>
-                            <a:srgbClr val="1F2A44"/>
-                          </a:solidFill>
-                          <a:latin typeface="Nunito Sans"/>
-                        </a:rPr>
-                        <a:t>5, 5, 5, 5</a:t>
-                      </a:r>
-                    </a:p>
-                  </a:txBody>
-                  <a:tcPr>
-                    <a:solidFill>
-                      <a:srgbClr val="FFFFFF"/>
-                    </a:solidFill>
-                  </a:tcPr>
-                </a:tc>
-                <a:tc>
-                  <a:txBody>
-                    <a:bodyPr/>
-                    <a:lstStyle/>
-                    <a:p>
-                      <a:r>
-                        <a:rPr sz="2000" b="0">
-                          <a:solidFill>
-                            <a:srgbClr val="1F2A44"/>
-                          </a:solidFill>
-                          <a:latin typeface="Nunito Sans"/>
-                        </a:rPr>
-                        <a:t>5</a:t>
-                      </a:r>
-                    </a:p>
-                  </a:txBody>
-                  <a:tcPr>
-                    <a:solidFill>
-                      <a:srgbClr val="FFFFFF"/>
-                    </a:solidFill>
-                  </a:tcPr>
-                </a:tc>
-              </a:tr>
-              <a:tr h="600000">
-                <a:tc>
-                  <a:txBody>
-                    <a:bodyPr/>
-                    <a:lstStyle/>
-                    <a:p>
-                      <a:r>
-                        <a:rPr sz="2000" b="0">
-                          <a:solidFill>
-                            <a:srgbClr val="1F2A44"/>
-                          </a:solidFill>
-                          <a:latin typeface="Nunito Sans"/>
-                        </a:rPr>
-                        <a:t>Instituto B</a:t>
-                      </a:r>
-                    </a:p>
-                  </a:txBody>
-                  <a:tcPr>
-                    <a:solidFill>
-                      <a:srgbClr val="EAF0F7"/>
-                    </a:solidFill>
-                  </a:tcPr>
-                </a:tc>
-                <a:tc>
-                  <a:txBody>
-                    <a:bodyPr/>
-                    <a:lstStyle/>
-                    <a:p>
-                      <a:r>
-                        <a:rPr sz="2000" b="0">
-                          <a:solidFill>
-                            <a:srgbClr val="1F2A44"/>
-                          </a:solidFill>
-                          <a:latin typeface="Nunito Sans"/>
-                        </a:rPr>
-                        <a:t>0, 0, 10, 10</a:t>
-                      </a:r>
-                    </a:p>
-                  </a:txBody>
-                  <a:tcPr>
-                    <a:solidFill>
-                      <a:srgbClr val="EAF0F7"/>
-                    </a:solidFill>
-                  </a:tcPr>
-                </a:tc>
-                <a:tc>
-                  <a:txBody>
-                    <a:bodyPr/>
-                    <a:lstStyle/>
-                    <a:p>
-                      <a:r>
-                        <a:rPr sz="2000" b="0">
-                          <a:solidFill>
-                            <a:srgbClr val="1F2A44"/>
-                          </a:solidFill>
-                          <a:latin typeface="Nunito Sans"/>
-                        </a:rPr>
-                        <a:t>5</a:t>
-                      </a:r>
-                    </a:p>
-                  </a:txBody>
-                  <a:tcPr>
-                    <a:solidFill>
-                      <a:srgbClr val="EAF0F7"/>
-                    </a:solidFill>
-                  </a:tcPr>
-                </a:tc>
-              </a:tr>
-              <a:tr h="600000">
-                <a:tc>
-                  <a:txBody>
-                    <a:bodyPr/>
-                    <a:lstStyle/>
-                    <a:p>
-                      <a:r>
-                        <a:rPr sz="2000" b="0">
-                          <a:solidFill>
-                            <a:srgbClr val="1F2A44"/>
-                          </a:solidFill>
-                          <a:latin typeface="Nunito Sans"/>
-                        </a:rPr>
-                        <a:t>¿Iguales?</a:t>
-                      </a:r>
-                    </a:p>
-                  </a:txBody>
-                  <a:tcPr>
-                    <a:solidFill>
-                      <a:srgbClr val="FFFFFF"/>
-                    </a:solidFill>
-                  </a:tcPr>
-                </a:tc>
-                <a:tc>
-                  <a:txBody>
-                    <a:bodyPr/>
-                    <a:lstStyle/>
-                    <a:p>
-                      <a:r>
-                        <a:rPr sz="2000" b="0">
-                          <a:solidFill>
-                            <a:srgbClr val="1F2A44"/>
-                          </a:solidFill>
-                          <a:latin typeface="Nunito Sans"/>
-                        </a:rPr>
-                        <a:t>A: todos aprueban justo. B: la mitad suspende</a:t>
-                      </a:r>
-                    </a:p>
-                  </a:txBody>
-                  <a:tcPr>
-                    <a:solidFill>
-                      <a:srgbClr val="FFFFFF"/>
-                    </a:solidFill>
-                  </a:tcPr>
-                </a:tc>
-                <a:tc>
-                  <a:txBody>
-                    <a:bodyPr/>
-                    <a:lstStyle/>
-                    <a:p>
-                      <a:r>
-                        <a:rPr sz="2000" b="0">
-                          <a:solidFill>
-                            <a:srgbClr val="1F2A44"/>
-                          </a:solidFill>
-                          <a:latin typeface="Nunito Sans"/>
-                        </a:rPr>
-                        <a:t>Misma media, institutos muy distintos</a:t>
-                      </a:r>
-                    </a:p>
-                  </a:txBody>
-                  <a:tcPr>
-                    <a:solidFill>
-                      <a:srgbClr val="FFFFFF"/>
-                    </a:solidFill>
-                  </a:tcPr>
-                </a:tc>
-              </a:tr>
-            </a:tbl>
-          </a:graphicData>
-        </a:graphic>
-      </p:graphicFrame>
+        </p:nvSpPr>
+        <p:spPr>
+          <a:xfrm>
+            <a:off x="640000" y="1650000"/>
+            <a:ext cx="10912000" cy="1150000"/>
+          </a:xfrm>
+          <a:prstGeom prst="rect">
+            <a:avLst/>
+          </a:prstGeom>
+          <a:solidFill>
+            <a:srgbClr val="EAF0F7"/>
+          </a:solidFill>
+          <a:ln>
+            <a:noFill/>
+          </a:ln>
+        </p:spPr>
+        <p:style>
+          <a:lnRef idx="1">
+            <a:schemeClr val="accent1"/>
+          </a:lnRef>
+          <a:fillRef idx="3">
+            <a:schemeClr val="accent1"/>
+          </a:fillRef>
+          <a:effectRef idx="2">
+            <a:schemeClr val="accent1"/>
+          </a:effectRef>
+          <a:fontRef idx="minor">
+            <a:schemeClr val="lt1"/>
+          </a:fontRef>
+        </p:style>
+        <p:txBody>
+          <a:bodyPr rtlCol="0" anchor="ctr"/>
+          <a:lstStyle/>
+          <a:p>
+            <a:pPr algn="ctr"/>
+          </a:p>
+        </p:txBody>
+      </p:sp>
+      <p:sp>
+        <p:nvSpPr>
+          <p:cNvPr id="5" name="TextBox 4"/>
+          <p:cNvSpPr txBox="1"/>
+          <p:nvPr/>
+        </p:nvSpPr>
+        <p:spPr>
+          <a:xfrm>
+            <a:off x="840000" y="1730000"/>
+            <a:ext cx="10512000" cy="1000000"/>
+          </a:xfrm>
+          <a:prstGeom prst="rect">
+            <a:avLst/>
+          </a:prstGeom>
+          <a:noFill/>
+        </p:spPr>
+        <p:txBody>
+          <a:bodyPr wrap="square" anchor="ctr">
+            <a:spAutoFit/>
+          </a:bodyPr>
+          <a:lstStyle/>
+          <a:p>
+            <a:pPr>
+              <a:spcAft>
+                <a:spcPts val="1260"/>
+              </a:spcAft>
+            </a:pPr>
+            <a:r>
+              <a:rPr sz="2800" b="1">
+                <a:solidFill>
+                  <a:srgbClr val="1F2A44"/>
+                </a:solidFill>
+                <a:latin typeface="Nunito Sans"/>
+              </a:rPr>
+              <a:t>Un problema sobre qué está </a:t>
+            </a:r>
+            <a:r>
+              <a:rPr sz="2800" b="1">
+                <a:solidFill>
+                  <a:srgbClr val="1F2A44"/>
+                </a:solidFill>
+                <a:latin typeface="Nunito Sans"/>
+              </a:rPr>
+              <a:t>bien</a:t>
+            </a:r>
+            <a:r>
+              <a:rPr sz="2800" b="1">
+                <a:solidFill>
+                  <a:srgbClr val="1F2A44"/>
+                </a:solidFill>
+                <a:latin typeface="Nunito Sans"/>
+              </a:rPr>
+              <a:t> hacer en el que hay </a:t>
+            </a:r>
+            <a:r>
+              <a:rPr sz="2800" b="1">
+                <a:solidFill>
+                  <a:srgbClr val="1F2A44"/>
+                </a:solidFill>
+                <a:latin typeface="Nunito Sans"/>
+              </a:rPr>
+              <a:t>buenas razones</a:t>
+            </a:r>
+            <a:r>
+              <a:rPr sz="2800" b="1">
+                <a:solidFill>
+                  <a:srgbClr val="1F2A44"/>
+                </a:solidFill>
+                <a:latin typeface="Nunito Sans"/>
+              </a:rPr>
+              <a:t> para dos respuestas.</a:t>
+            </a:r>
+          </a:p>
+        </p:txBody>
+      </p:sp>
+      <p:sp>
+        <p:nvSpPr>
+          <p:cNvPr id="6" name="TextBox 5"/>
+          <p:cNvSpPr txBox="1"/>
+          <p:nvPr/>
+        </p:nvSpPr>
+        <p:spPr>
+          <a:xfrm>
+            <a:off x="640000" y="3000000"/>
+            <a:ext cx="10912000" cy="3458000"/>
+          </a:xfrm>
+          <a:prstGeom prst="rect">
+            <a:avLst/>
+          </a:prstGeom>
+          <a:noFill/>
+        </p:spPr>
+        <p:txBody>
+          <a:bodyPr wrap="square">
+            <a:spAutoFit/>
+          </a:bodyPr>
+          <a:lstStyle/>
+          <a:p>
+            <a:pPr>
+              <a:spcAft>
+                <a:spcPts val="1260"/>
+              </a:spcAft>
+            </a:pPr>
+            <a:r>
+              <a:rPr sz="2800" b="1">
+                <a:solidFill>
+                  <a:srgbClr val="E8793A"/>
+                </a:solidFill>
+                <a:latin typeface="Nunito Sans"/>
+              </a:rPr>
+              <a:t>• </a:t>
+            </a:r>
+            <a:r>
+              <a:rPr sz="2800" b="0">
+                <a:solidFill>
+                  <a:srgbClr val="1F2A44"/>
+                </a:solidFill>
+                <a:latin typeface="Nunito Sans"/>
+              </a:rPr>
+              <a:t>Aparece cuando dos </a:t>
+            </a:r>
+            <a:r>
+              <a:rPr sz="2800" b="1">
+                <a:solidFill>
+                  <a:srgbClr val="1F2A44"/>
+                </a:solidFill>
+                <a:latin typeface="Nunito Sans"/>
+              </a:rPr>
+              <a:t>valores</a:t>
+            </a:r>
+            <a:r>
+              <a:rPr sz="2800" b="0">
+                <a:solidFill>
+                  <a:srgbClr val="1F2A44"/>
+                </a:solidFill>
+                <a:latin typeface="Nunito Sans"/>
+              </a:rPr>
+              <a:t> chocan</a:t>
+            </a:r>
+          </a:p>
+          <a:p>
+            <a:pPr>
+              <a:spcAft>
+                <a:spcPts val="1260"/>
+              </a:spcAft>
+            </a:pPr>
+            <a:r>
+              <a:rPr sz="2800" b="1">
+                <a:solidFill>
+                  <a:srgbClr val="E8793A"/>
+                </a:solidFill>
+                <a:latin typeface="Nunito Sans"/>
+              </a:rPr>
+              <a:t>• </a:t>
+            </a:r>
+            <a:r>
+              <a:rPr sz="2800" b="0">
+                <a:solidFill>
+                  <a:srgbClr val="1F2A44"/>
+                </a:solidFill>
+                <a:latin typeface="Nunito Sans"/>
+              </a:rPr>
+              <a:t>Decidas lo que decidas, algo se pierde</a:t>
+            </a:r>
+          </a:p>
+          <a:p>
+            <a:pPr>
+              <a:spcAft>
+                <a:spcPts val="1260"/>
+              </a:spcAft>
+            </a:pPr>
+            <a:r>
+              <a:rPr sz="2800" b="1">
+                <a:solidFill>
+                  <a:srgbClr val="E8793A"/>
+                </a:solidFill>
+                <a:latin typeface="Nunito Sans"/>
+              </a:rPr>
+              <a:t>• </a:t>
+            </a:r>
+            <a:r>
+              <a:rPr sz="2800" b="0">
+                <a:solidFill>
+                  <a:srgbClr val="1F2A44"/>
+                </a:solidFill>
+                <a:latin typeface="Nunito Sans"/>
+              </a:rPr>
+              <a:t>Por eso cuesta: no es una pregunta de examen con solución fácil</a:t>
+            </a:r>
+          </a:p>
+        </p:txBody>
+      </p:sp>
     </p:spTree>
   </p:cSld>
   <p:clrMapOvr>
@@ -7996,7 +6821,7 @@
                 </a:solidFill>
                 <a:latin typeface="Nunito Sans"/>
               </a:rPr>
-              <a:t>BLOQUE 1 · LA MEDIA Y LA ANÉCDOTA</a:t>
+              <a:t>BLOQUE 1 · QUÉ ES UN DILEMA</a:t>
             </a:r>
           </a:p>
         </p:txBody>
@@ -8035,7 +6860,375 @@
                 </a:solidFill>
                 <a:latin typeface="Fredoka"/>
               </a:rPr>
-              <a:t>Anécdota</a:t>
+              <a:t>Valores que suelen chocar</a:t>
+            </a:r>
+          </a:p>
+        </p:txBody>
+      </p:sp>
+      <p:graphicFrame>
+        <p:nvGraphicFramePr>
+          <p:cNvPr id="4" name="Table 3"/>
+          <p:cNvGraphicFramePr>
+            <a:graphicFrameLocks noGrp="1"/>
+          </p:cNvGraphicFramePr>
+          <p:nvPr/>
+        </p:nvGraphicFramePr>
+        <p:xfrm>
+          <a:off x="640000" y="1700000"/>
+          <a:ext cx="10912000" cy="2400000"/>
+        </p:xfrm>
+        <a:graphic>
+          <a:graphicData uri="http://schemas.openxmlformats.org/drawingml/2006/table">
+            <a:tbl>
+              <a:tblPr firstRow="1" bandRow="1">
+                <a:tableStyleId>{5C22544A-7EE6-4342-B048-85BDC9FD1C3A}</a:tableStyleId>
+              </a:tblPr>
+              <a:tblGrid>
+                <a:gridCol w="5456000"/>
+                <a:gridCol w="5456000"/>
+              </a:tblGrid>
+              <a:tr h="600000">
+                <a:tc>
+                  <a:txBody>
+                    <a:bodyPr/>
+                    <a:lstStyle/>
+                    <a:p>
+                      <a:r>
+                        <a:rPr sz="2000" b="1">
+                          <a:solidFill>
+                            <a:srgbClr val="FBF7EF"/>
+                          </a:solidFill>
+                          <a:latin typeface="Fredoka"/>
+                        </a:rPr>
+                        <a:t>Choque</a:t>
+                      </a:r>
+                    </a:p>
+                  </a:txBody>
+                  <a:tcPr>
+                    <a:solidFill>
+                      <a:srgbClr val="1F2A44"/>
+                    </a:solidFill>
+                  </a:tcPr>
+                </a:tc>
+                <a:tc>
+                  <a:txBody>
+                    <a:bodyPr/>
+                    <a:lstStyle/>
+                    <a:p>
+                      <a:r>
+                        <a:rPr sz="2000" b="1">
+                          <a:solidFill>
+                            <a:srgbClr val="FBF7EF"/>
+                          </a:solidFill>
+                          <a:latin typeface="Fredoka"/>
+                        </a:rPr>
+                        <a:t>Ejemplo</a:t>
+                      </a:r>
+                    </a:p>
+                  </a:txBody>
+                  <a:tcPr>
+                    <a:solidFill>
+                      <a:srgbClr val="1F2A44"/>
+                    </a:solidFill>
+                  </a:tcPr>
+                </a:tc>
+              </a:tr>
+              <a:tr h="600000">
+                <a:tc>
+                  <a:txBody>
+                    <a:bodyPr/>
+                    <a:lstStyle/>
+                    <a:p>
+                      <a:r>
+                        <a:rPr sz="2000" b="1">
+                          <a:solidFill>
+                            <a:srgbClr val="1F2A44"/>
+                          </a:solidFill>
+                          <a:latin typeface="Nunito Sans"/>
+                        </a:rPr>
+                        <a:t>Lealtad</a:t>
+                      </a:r>
+                      <a:r>
+                        <a:rPr sz="2000" b="0">
+                          <a:solidFill>
+                            <a:srgbClr val="1F2A44"/>
+                          </a:solidFill>
+                          <a:latin typeface="Nunito Sans"/>
+                        </a:rPr>
+                        <a:t> y </a:t>
+                      </a:r>
+                      <a:r>
+                        <a:rPr sz="2000" b="1">
+                          <a:solidFill>
+                            <a:srgbClr val="1F2A44"/>
+                          </a:solidFill>
+                          <a:latin typeface="Nunito Sans"/>
+                        </a:rPr>
+                        <a:t>justicia</a:t>
+                      </a:r>
+                    </a:p>
+                  </a:txBody>
+                  <a:tcPr>
+                    <a:solidFill>
+                      <a:srgbClr val="FFFFFF"/>
+                    </a:solidFill>
+                  </a:tcPr>
+                </a:tc>
+                <a:tc>
+                  <a:txBody>
+                    <a:bodyPr/>
+                    <a:lstStyle/>
+                    <a:p>
+                      <a:r>
+                        <a:rPr sz="2000" b="0">
+                          <a:solidFill>
+                            <a:srgbClr val="1F2A44"/>
+                          </a:solidFill>
+                          <a:latin typeface="Nunito Sans"/>
+                        </a:rPr>
+                        <a:t>Callar lo que hizo mi amiga o ser justo con los demás</a:t>
+                      </a:r>
+                    </a:p>
+                  </a:txBody>
+                  <a:tcPr>
+                    <a:solidFill>
+                      <a:srgbClr val="FFFFFF"/>
+                    </a:solidFill>
+                  </a:tcPr>
+                </a:tc>
+              </a:tr>
+              <a:tr h="600000">
+                <a:tc>
+                  <a:txBody>
+                    <a:bodyPr/>
+                    <a:lstStyle/>
+                    <a:p>
+                      <a:r>
+                        <a:rPr sz="2000" b="1">
+                          <a:solidFill>
+                            <a:srgbClr val="1F2A44"/>
+                          </a:solidFill>
+                          <a:latin typeface="Nunito Sans"/>
+                        </a:rPr>
+                        <a:t>Sinceridad</a:t>
+                      </a:r>
+                      <a:r>
+                        <a:rPr sz="2000" b="0">
+                          <a:solidFill>
+                            <a:srgbClr val="1F2A44"/>
+                          </a:solidFill>
+                          <a:latin typeface="Nunito Sans"/>
+                        </a:rPr>
+                        <a:t> y </a:t>
+                      </a:r>
+                      <a:r>
+                        <a:rPr sz="2000" b="1">
+                          <a:solidFill>
+                            <a:srgbClr val="1F2A44"/>
+                          </a:solidFill>
+                          <a:latin typeface="Nunito Sans"/>
+                        </a:rPr>
+                        <a:t>no hacer daño</a:t>
+                      </a:r>
+                    </a:p>
+                  </a:txBody>
+                  <a:tcPr>
+                    <a:solidFill>
+                      <a:srgbClr val="EAF0F7"/>
+                    </a:solidFill>
+                  </a:tcPr>
+                </a:tc>
+                <a:tc>
+                  <a:txBody>
+                    <a:bodyPr/>
+                    <a:lstStyle/>
+                    <a:p>
+                      <a:r>
+                        <a:rPr sz="2000" b="0">
+                          <a:solidFill>
+                            <a:srgbClr val="1F2A44"/>
+                          </a:solidFill>
+                          <a:latin typeface="Nunito Sans"/>
+                        </a:rPr>
+                        <a:t>Decir lo que pienso de un dibujo o no herir a su autor</a:t>
+                      </a:r>
+                    </a:p>
+                  </a:txBody>
+                  <a:tcPr>
+                    <a:solidFill>
+                      <a:srgbClr val="EAF0F7"/>
+                    </a:solidFill>
+                  </a:tcPr>
+                </a:tc>
+              </a:tr>
+              <a:tr h="600000">
+                <a:tc>
+                  <a:txBody>
+                    <a:bodyPr/>
+                    <a:lstStyle/>
+                    <a:p>
+                      <a:r>
+                        <a:rPr sz="2000" b="1">
+                          <a:solidFill>
+                            <a:srgbClr val="1F2A44"/>
+                          </a:solidFill>
+                          <a:latin typeface="Nunito Sans"/>
+                        </a:rPr>
+                        <a:t>Libertad</a:t>
+                      </a:r>
+                      <a:r>
+                        <a:rPr sz="2000" b="0">
+                          <a:solidFill>
+                            <a:srgbClr val="1F2A44"/>
+                          </a:solidFill>
+                          <a:latin typeface="Nunito Sans"/>
+                        </a:rPr>
+                        <a:t> y </a:t>
+                      </a:r>
+                      <a:r>
+                        <a:rPr sz="2000" b="1">
+                          <a:solidFill>
+                            <a:srgbClr val="1F2A44"/>
+                          </a:solidFill>
+                          <a:latin typeface="Nunito Sans"/>
+                        </a:rPr>
+                        <a:t>seguridad</a:t>
+                      </a:r>
+                    </a:p>
+                  </a:txBody>
+                  <a:tcPr>
+                    <a:solidFill>
+                      <a:srgbClr val="FFFFFF"/>
+                    </a:solidFill>
+                  </a:tcPr>
+                </a:tc>
+                <a:tc>
+                  <a:txBody>
+                    <a:bodyPr/>
+                    <a:lstStyle/>
+                    <a:p>
+                      <a:r>
+                        <a:rPr sz="2000" b="0">
+                          <a:solidFill>
+                            <a:srgbClr val="1F2A44"/>
+                          </a:solidFill>
+                          <a:latin typeface="Nunito Sans"/>
+                        </a:rPr>
+                        <a:t>Volver tarde de una fiesta o que mi familia esté tranquila</a:t>
+                      </a:r>
+                    </a:p>
+                  </a:txBody>
+                  <a:tcPr>
+                    <a:solidFill>
+                      <a:srgbClr val="FFFFFF"/>
+                    </a:solidFill>
+                  </a:tcPr>
+                </a:tc>
+              </a:tr>
+            </a:tbl>
+          </a:graphicData>
+        </a:graphic>
+      </p:graphicFrame>
+    </p:spTree>
+  </p:cSld>
+  <p:clrMapOvr>
+    <a:masterClrMapping/>
+  </p:clrMapOvr>
+</p:sld>
+</file>
+
+<file path=ppt/slides/slide9.xml><?xml version="1.0" encoding="utf-8"?>
+<p:sld xmlns:a="http://schemas.openxmlformats.org/drawingml/2006/main" xmlns:p="http://schemas.openxmlformats.org/presentationml/2006/main" xmlns:r="http://schemas.openxmlformats.org/officeDocument/2006/relationships">
+  <p:cSld>
+    <p:bg>
+      <p:bgPr>
+        <a:solidFill>
+          <a:srgbClr val="FBF7EF"/>
+        </a:solidFill>
+        <a:effectLst/>
+      </p:bgPr>
+    </p:bg>
+    <p:spTree>
+      <p:nvGrpSpPr>
+        <p:cNvPr id="1" name=""/>
+        <p:cNvGrpSpPr/>
+        <p:nvPr/>
+      </p:nvGrpSpPr>
+      <p:grpSpPr/>
+      <p:sp>
+        <p:nvSpPr>
+          <p:cNvPr id="2" name="TextBox 1"/>
+          <p:cNvSpPr txBox="1"/>
+          <p:nvPr/>
+        </p:nvSpPr>
+        <p:spPr>
+          <a:xfrm>
+            <a:off x="640000" y="380000"/>
+            <a:ext cx="10912000" cy="420000"/>
+          </a:xfrm>
+          <a:prstGeom prst="rect">
+            <a:avLst/>
+          </a:prstGeom>
+          <a:noFill/>
+        </p:spPr>
+        <p:txBody>
+          <a:bodyPr wrap="square">
+            <a:spAutoFit/>
+          </a:bodyPr>
+          <a:lstStyle/>
+          <a:p>
+            <a:pPr>
+              <a:spcAft>
+                <a:spcPts val="630"/>
+              </a:spcAft>
+            </a:pPr>
+            <a:r>
+              <a:rPr sz="1400" b="1">
+                <a:solidFill>
+                  <a:srgbClr val="E8793A"/>
+                </a:solidFill>
+                <a:latin typeface="Nunito Sans"/>
+              </a:rPr>
+              <a:t>BLOQUE 1 · QUÉ ES UN DILEMA</a:t>
+            </a:r>
+          </a:p>
+        </p:txBody>
+      </p:sp>
+      <p:sp>
+        <p:nvSpPr>
+          <p:cNvPr id="3" name="TextBox 2"/>
+          <p:cNvSpPr txBox="1"/>
+          <p:nvPr/>
+        </p:nvSpPr>
+        <p:spPr>
+          <a:xfrm>
+            <a:off x="640000" y="760000"/>
+            <a:ext cx="10912000" cy="800000"/>
+          </a:xfrm>
+          <a:prstGeom prst="rect">
+            <a:avLst/>
+          </a:prstGeom>
+          <a:noFill/>
+        </p:spPr>
+        <p:txBody>
+          <a:bodyPr wrap="square">
+            <a:spAutoFit/>
+          </a:bodyPr>
+          <a:lstStyle/>
+          <a:p>
+            <a:pPr>
+              <a:spcAft>
+                <a:spcPts val="1710"/>
+              </a:spcAft>
+            </a:pPr>
+            <a:r>
+              <a:rPr sz="3800" b="1">
+                <a:solidFill>
+                  <a:srgbClr val="1F2A44"/>
+                </a:solidFill>
+                <a:latin typeface="Fredoka"/>
+              </a:rPr>
+              <a:t>¿Es un dilema?</a:t>
             </a:r>
           </a:p>
         </p:txBody>
@@ -8049,13 +7242,13 @@
         <p:spPr>
           <a:xfrm>
             <a:off x="640000" y="1650000"/>
-            <a:ext cx="10912000" cy="1150000"/>
+            <a:ext cx="5306000" cy="4400000"/>
           </a:xfrm>
           <a:prstGeom prst="rect">
             <a:avLst/>
           </a:prstGeom>
           <a:solidFill>
-            <a:srgbClr val="EAF0F7"/>
+            <a:srgbClr val="FBE3D2"/>
           </a:solidFill>
           <a:ln>
             <a:noFill/>
@@ -8091,8 +7284,8 @@
         </p:nvSpPr>
         <p:spPr>
           <a:xfrm>
-            <a:off x="840000" y="1730000"/>
-            <a:ext cx="10512000" cy="1000000"/>
+            <a:off x="840000" y="1750000"/>
+            <a:ext cx="4906000" cy="600000"/>
           </a:xfrm>
           <a:prstGeom prst="rect">
             <a:avLst/>
@@ -8100,7 +7293,7 @@
           <a:noFill/>
         </p:spPr>
         <p:txBody>
-          <a:bodyPr wrap="square" anchor="ctr">
+          <a:bodyPr wrap="square">
             <a:spAutoFit/>
           </a:bodyPr>
           <a:lstStyle/>
@@ -8113,11 +7306,11 @@
             <a:r>
               <a:rPr sz="2800" b="1">
                 <a:solidFill>
-                  <a:srgbClr val="1F2A44"/>
-                </a:solidFill>
-                <a:latin typeface="Nunito Sans"/>
-              </a:rPr>
-              <a:t>Una anécdota es un caso suelto que alguien cuenta. Puede ser verdad, pero no dice cómo es la mayoría.</a:t>
+                  <a:srgbClr val="C2531C"/>
+                </a:solidFill>
+                <a:latin typeface="Nunito Sans"/>
+              </a:rPr>
+              <a:t>No es un dilema</a:t>
             </a:r>
           </a:p>
         </p:txBody>
@@ -8130,8 +7323,167 @@
         </p:nvSpPr>
         <p:spPr>
           <a:xfrm>
-            <a:off x="640000" y="3000000"/>
-            <a:ext cx="10912000" cy="3458000"/>
+            <a:off x="840000" y="2400000"/>
+            <a:ext cx="4906000" cy="3500000"/>
+          </a:xfrm>
+          <a:prstGeom prst="rect">
+            <a:avLst/>
+          </a:prstGeom>
+          <a:noFill/>
+        </p:spPr>
+        <p:txBody>
+          <a:bodyPr wrap="square">
+            <a:spAutoFit/>
+          </a:bodyPr>
+          <a:lstStyle/>
+          <a:p>
+            <a:pPr>
+              <a:spcAft>
+                <a:spcPts val="1170"/>
+              </a:spcAft>
+            </a:pPr>
+            <a:r>
+              <a:rPr sz="2600" b="1">
+                <a:solidFill>
+                  <a:srgbClr val="E8793A"/>
+                </a:solidFill>
+                <a:latin typeface="Nunito Sans"/>
+              </a:rPr>
+              <a:t>• </a:t>
+            </a:r>
+            <a:r>
+              <a:rPr sz="2600" b="0">
+                <a:solidFill>
+                  <a:srgbClr val="1F2A44"/>
+                </a:solidFill>
+                <a:latin typeface="Nunito Sans"/>
+              </a:rPr>
+              <a:t>Elegir entre dos </a:t>
+            </a:r>
+            <a:r>
+              <a:rPr sz="2600" b="1">
+                <a:solidFill>
+                  <a:srgbClr val="1F2A44"/>
+                </a:solidFill>
+                <a:latin typeface="Nunito Sans"/>
+              </a:rPr>
+              <a:t>gustos</a:t>
+            </a:r>
+            <a:r>
+              <a:rPr sz="2600" b="0">
+                <a:solidFill>
+                  <a:srgbClr val="1F2A44"/>
+                </a:solidFill>
+                <a:latin typeface="Nunito Sans"/>
+              </a:rPr>
+              <a:t>: pizza o hamburguesa</a:t>
+            </a:r>
+          </a:p>
+          <a:p>
+            <a:pPr>
+              <a:spcAft>
+                <a:spcPts val="1170"/>
+              </a:spcAft>
+            </a:pPr>
+            <a:r>
+              <a:rPr sz="2600" b="1">
+                <a:solidFill>
+                  <a:srgbClr val="E8793A"/>
+                </a:solidFill>
+                <a:latin typeface="Nunito Sans"/>
+              </a:rPr>
+              <a:t>• </a:t>
+            </a:r>
+            <a:r>
+              <a:rPr sz="2600" b="0">
+                <a:solidFill>
+                  <a:srgbClr val="1F2A44"/>
+                </a:solidFill>
+                <a:latin typeface="Nunito Sans"/>
+              </a:rPr>
+              <a:t>Saber qué está bien y no apetecer hacerlo</a:t>
+            </a:r>
+          </a:p>
+          <a:p>
+            <a:pPr>
+              <a:spcAft>
+                <a:spcPts val="1170"/>
+              </a:spcAft>
+            </a:pPr>
+            <a:r>
+              <a:rPr sz="2600" b="1">
+                <a:solidFill>
+                  <a:srgbClr val="E8793A"/>
+                </a:solidFill>
+                <a:latin typeface="Nunito Sans"/>
+              </a:rPr>
+              <a:t>• </a:t>
+            </a:r>
+            <a:r>
+              <a:rPr sz="2600" b="0">
+                <a:solidFill>
+                  <a:srgbClr val="1F2A44"/>
+                </a:solidFill>
+                <a:latin typeface="Nunito Sans"/>
+              </a:rPr>
+              <a:t>Una opción claramente injusta contra otra justa</a:t>
+            </a:r>
+          </a:p>
+        </p:txBody>
+      </p:sp>
+      <p:sp>
+        <p:nvSpPr>
+          <p:cNvPr id="7" name="Rectangle 6"/>
+          <p:cNvSpPr/>
+          <p:nvPr/>
+        </p:nvSpPr>
+        <p:spPr>
+          <a:xfrm>
+            <a:off x="6246000" y="1650000"/>
+            <a:ext cx="5306000" cy="4400000"/>
+          </a:xfrm>
+          <a:prstGeom prst="rect">
+            <a:avLst/>
+          </a:prstGeom>
+          <a:solidFill>
+            <a:srgbClr val="EAF0F7"/>
+          </a:solidFill>
+          <a:ln>
+            <a:noFill/>
+          </a:ln>
+        </p:spPr>
+        <p:style>
+          <a:lnRef idx="1">
+            <a:schemeClr val="accent1"/>
+          </a:lnRef>
+          <a:fillRef idx="3">
+            <a:schemeClr val="accent1"/>
+          </a:fillRef>
+          <a:effectRef idx="2">
+            <a:schemeClr val="accent1"/>
+          </a:effectRef>
+          <a:fontRef idx="minor">
+            <a:schemeClr val="lt1"/>
+          </a:fontRef>
+        </p:style>
+        <p:txBody>
+          <a:bodyPr rtlCol="0" anchor="ctr"/>
+          <a:lstStyle/>
+          <a:p>
+            <a:pPr algn="ctr"/>
+          </a:p>
+        </p:txBody>
+      </p:sp>
+      <p:sp>
+        <p:nvSpPr>
+          <p:cNvPr id="8" name="TextBox 7"/>
+          <p:cNvSpPr txBox="1"/>
+          <p:nvPr/>
+        </p:nvSpPr>
+        <p:spPr>
+          <a:xfrm>
+            <a:off x="6446000" y="1750000"/>
+            <a:ext cx="4906000" cy="600000"/>
           </a:xfrm>
           <a:prstGeom prst="rect">
             <a:avLst/>
@@ -8152,146 +7504,25 @@
             <a:r>
               <a:rPr sz="2800" b="1">
                 <a:solidFill>
-                  <a:srgbClr val="E8793A"/>
-                </a:solidFill>
-                <a:latin typeface="Nunito Sans"/>
-              </a:rPr>
-              <a:t>• </a:t>
-            </a:r>
-            <a:r>
-              <a:rPr sz="2800" b="0">
-                <a:solidFill>
-                  <a:srgbClr val="1F2A44"/>
-                </a:solidFill>
-                <a:latin typeface="Nunito Sans"/>
-              </a:rPr>
-              <a:t>«Mi abuelo fumó toda la vida y vivió 95 años»</a:t>
-            </a:r>
-          </a:p>
-          <a:p>
-            <a:pPr>
-              <a:spcAft>
-                <a:spcPts val="1260"/>
-              </a:spcAft>
-            </a:pPr>
-            <a:r>
-              <a:rPr sz="2800" b="1">
-                <a:solidFill>
-                  <a:srgbClr val="E8793A"/>
-                </a:solidFill>
-                <a:latin typeface="Nunito Sans"/>
-              </a:rPr>
-              <a:t>• </a:t>
-            </a:r>
-            <a:r>
-              <a:rPr sz="2800" b="0">
-                <a:solidFill>
-                  <a:srgbClr val="1F2A44"/>
-                </a:solidFill>
-                <a:latin typeface="Nunito Sans"/>
-              </a:rPr>
-              <a:t>Un caso suelto </a:t>
-            </a:r>
-            <a:r>
-              <a:rPr sz="2800" b="1">
-                <a:solidFill>
-                  <a:srgbClr val="1F2A44"/>
-                </a:solidFill>
-                <a:latin typeface="Nunito Sans"/>
-              </a:rPr>
-              <a:t>no dice</a:t>
-            </a:r>
-            <a:r>
-              <a:rPr sz="2800" b="0">
-                <a:solidFill>
-                  <a:srgbClr val="1F2A44"/>
-                </a:solidFill>
-                <a:latin typeface="Nunito Sans"/>
-              </a:rPr>
-              <a:t> cómo es la mayoría</a:t>
-            </a:r>
-          </a:p>
-          <a:p>
-            <a:pPr>
-              <a:spcAft>
-                <a:spcPts val="1260"/>
-              </a:spcAft>
-            </a:pPr>
-            <a:r>
-              <a:rPr sz="2800" b="1">
-                <a:solidFill>
-                  <a:srgbClr val="E8793A"/>
-                </a:solidFill>
-                <a:latin typeface="Nunito Sans"/>
-              </a:rPr>
-              <a:t>• </a:t>
-            </a:r>
-            <a:r>
-              <a:rPr sz="2800" b="0">
-                <a:solidFill>
-                  <a:srgbClr val="1F2A44"/>
-                </a:solidFill>
-                <a:latin typeface="Nunito Sans"/>
-              </a:rPr>
-              <a:t>Los datos salen de </a:t>
-            </a:r>
-            <a:r>
-              <a:rPr sz="2800" b="1">
-                <a:solidFill>
-                  <a:srgbClr val="1F2A44"/>
-                </a:solidFill>
-                <a:latin typeface="Nunito Sans"/>
-              </a:rPr>
-              <a:t>muchos</a:t>
-            </a:r>
-            <a:r>
-              <a:rPr sz="2800" b="0">
-                <a:solidFill>
-                  <a:srgbClr val="1F2A44"/>
-                </a:solidFill>
-                <a:latin typeface="Nunito Sans"/>
-              </a:rPr>
-              <a:t> casos contados bien</a:t>
-            </a:r>
-          </a:p>
-        </p:txBody>
-      </p:sp>
-    </p:spTree>
-  </p:cSld>
-  <p:clrMapOvr>
-    <a:masterClrMapping/>
-  </p:clrMapOvr>
-</p:sld>
-</file>
-
-<file path=ppt/slides/slide9.xml><?xml version="1.0" encoding="utf-8"?>
-<p:sld xmlns:a="http://schemas.openxmlformats.org/drawingml/2006/main" xmlns:p="http://schemas.openxmlformats.org/presentationml/2006/main" xmlns:r="http://schemas.openxmlformats.org/officeDocument/2006/relationships">
-  <p:cSld>
-    <p:bg>
-      <p:bgPr>
-        <a:solidFill>
-          <a:srgbClr val="1F2A44"/>
-        </a:solidFill>
-        <a:effectLst/>
-      </p:bgPr>
-    </p:bg>
-    <p:spTree>
-      <p:nvGrpSpPr>
-        <p:cNvPr id="1" name=""/>
-        <p:cNvGrpSpPr/>
-        <p:nvPr/>
-      </p:nvGrpSpPr>
-      <p:grpSpPr/>
-      <p:sp>
-        <p:nvSpPr>
-          <p:cNvPr id="2" name="TextBox 1"/>
+                  <a:srgbClr val="2F6FB5"/>
+                </a:solidFill>
+                <a:latin typeface="Nunito Sans"/>
+              </a:rPr>
+              <a:t>Sí es un dilema</a:t>
+            </a:r>
+          </a:p>
+        </p:txBody>
+      </p:sp>
+      <p:sp>
+        <p:nvSpPr>
+          <p:cNvPr id="9" name="TextBox 8"/>
           <p:cNvSpPr txBox="1"/>
           <p:nvPr/>
         </p:nvSpPr>
         <p:spPr>
           <a:xfrm>
-            <a:off x="640000" y="2300000"/>
-            <a:ext cx="10912000" cy="500000"/>
+            <a:off x="6446000" y="2400000"/>
+            <a:ext cx="4906000" cy="3500000"/>
           </a:xfrm>
           <a:prstGeom prst="rect">
             <a:avLst/>
@@ -8306,56 +7537,76 @@
           <a:p>
             <a:pPr>
               <a:spcAft>
-                <a:spcPts val="810"/>
+                <a:spcPts val="1170"/>
               </a:spcAft>
             </a:pPr>
             <a:r>
-              <a:rPr sz="1800" b="1">
-                <a:solidFill>
-                  <a:srgbClr val="F4B183"/>
-                </a:solidFill>
-                <a:latin typeface="Nunito Sans"/>
-              </a:rPr>
-              <a:t>BLOQUE 2</a:t>
-            </a:r>
-          </a:p>
-        </p:txBody>
-      </p:sp>
-      <p:sp>
-        <p:nvSpPr>
-          <p:cNvPr id="3" name="TextBox 2"/>
-          <p:cNvSpPr txBox="1"/>
-          <p:nvPr/>
-        </p:nvSpPr>
-        <p:spPr>
-          <a:xfrm>
-            <a:off x="640000" y="2800000"/>
-            <a:ext cx="10912000" cy="800000"/>
-          </a:xfrm>
-          <a:prstGeom prst="rect">
-            <a:avLst/>
-          </a:prstGeom>
-          <a:noFill/>
-        </p:spPr>
-        <p:txBody>
-          <a:bodyPr wrap="square">
-            <a:spAutoFit/>
-          </a:bodyPr>
-          <a:lstStyle/>
+              <a:rPr sz="2600" b="1">
+                <a:solidFill>
+                  <a:srgbClr val="E8793A"/>
+                </a:solidFill>
+                <a:latin typeface="Nunito Sans"/>
+              </a:rPr>
+              <a:t>• </a:t>
+            </a:r>
+            <a:r>
+              <a:rPr sz="2600" b="0">
+                <a:solidFill>
+                  <a:srgbClr val="1F2A44"/>
+                </a:solidFill>
+                <a:latin typeface="Nunito Sans"/>
+              </a:rPr>
+              <a:t>Las dos opciones tienen buenas razones</a:t>
+            </a:r>
+          </a:p>
           <a:p>
             <a:pPr>
               <a:spcAft>
-                <a:spcPts val="2160"/>
+                <a:spcPts val="1170"/>
               </a:spcAft>
             </a:pPr>
             <a:r>
-              <a:rPr sz="4800" b="1">
-                <a:solidFill>
-                  <a:srgbClr val="FBF7EF"/>
-                </a:solidFill>
-                <a:latin typeface="Fredoka"/>
-              </a:rPr>
-              <a:t>Casos resueltos</a:t>
+              <a:rPr sz="2600" b="1">
+                <a:solidFill>
+                  <a:srgbClr val="E8793A"/>
+                </a:solidFill>
+                <a:latin typeface="Nunito Sans"/>
+              </a:rPr>
+              <a:t>• </a:t>
+            </a:r>
+            <a:r>
+              <a:rPr sz="2600" b="0">
+                <a:solidFill>
+                  <a:srgbClr val="1F2A44"/>
+                </a:solidFill>
+                <a:latin typeface="Nunito Sans"/>
+              </a:rPr>
+              <a:t>Chocan dos valores importantes</a:t>
+            </a:r>
+          </a:p>
+          <a:p>
+            <a:pPr>
+              <a:spcAft>
+                <a:spcPts val="1170"/>
+              </a:spcAft>
+            </a:pPr>
+            <a:r>
+              <a:rPr sz="2600" b="1">
+                <a:solidFill>
+                  <a:srgbClr val="E8793A"/>
+                </a:solidFill>
+                <a:latin typeface="Nunito Sans"/>
+              </a:rPr>
+              <a:t>• </a:t>
+            </a:r>
+            <a:r>
+              <a:rPr sz="2600" b="0">
+                <a:solidFill>
+                  <a:srgbClr val="1F2A44"/>
+                </a:solidFill>
+                <a:latin typeface="Nunito Sans"/>
+              </a:rPr>
+              <a:t>Hay que pensar qué pesa más</a:t>
             </a:r>
           </a:p>
         </p:txBody>
